--- a/3DLV3/Plam/企画書.pptx
+++ b/3DLV3/Plam/企画書.pptx
@@ -5,22 +5,23 @@
     <p:sldMasterId id="2147483889" r:id="rId1"/>
   </p:sldMasterIdLst>
   <p:notesMasterIdLst>
-    <p:notesMasterId r:id="rId15"/>
+    <p:notesMasterId r:id="rId16"/>
   </p:notesMasterIdLst>
   <p:sldIdLst>
     <p:sldId id="264" r:id="rId2"/>
-    <p:sldId id="258" r:id="rId3"/>
-    <p:sldId id="263" r:id="rId4"/>
-    <p:sldId id="259" r:id="rId5"/>
-    <p:sldId id="257" r:id="rId6"/>
-    <p:sldId id="261" r:id="rId7"/>
-    <p:sldId id="273" r:id="rId8"/>
-    <p:sldId id="265" r:id="rId9"/>
-    <p:sldId id="268" r:id="rId10"/>
-    <p:sldId id="274" r:id="rId11"/>
-    <p:sldId id="267" r:id="rId12"/>
-    <p:sldId id="271" r:id="rId13"/>
-    <p:sldId id="266" r:id="rId14"/>
+    <p:sldId id="275" r:id="rId3"/>
+    <p:sldId id="258" r:id="rId4"/>
+    <p:sldId id="263" r:id="rId5"/>
+    <p:sldId id="259" r:id="rId6"/>
+    <p:sldId id="257" r:id="rId7"/>
+    <p:sldId id="261" r:id="rId8"/>
+    <p:sldId id="273" r:id="rId9"/>
+    <p:sldId id="265" r:id="rId10"/>
+    <p:sldId id="268" r:id="rId11"/>
+    <p:sldId id="274" r:id="rId12"/>
+    <p:sldId id="267" r:id="rId13"/>
+    <p:sldId id="271" r:id="rId14"/>
+    <p:sldId id="266" r:id="rId15"/>
   </p:sldIdLst>
   <p:sldSz cx="12192000" cy="6858000"/>
   <p:notesSz cx="6858000" cy="9144000"/>
@@ -138,6 +139,58 @@
 </p:presentation>
 </file>
 
+<file path=ppt/changesInfos/changesInfo1.xml><?xml version="1.0" encoding="utf-8"?>
+<pc:chgInfo xmlns:a="http://schemas.openxmlformats.org/drawingml/2006/main" xmlns:r="http://schemas.openxmlformats.org/officeDocument/2006/relationships" xmlns:ac="http://schemas.microsoft.com/office/drawing/2013/main/command" xmlns:pc="http://schemas.microsoft.com/office/powerpoint/2013/main/command">
+  <pc:docChgLst>
+    <pc:chgData name="kousuke yamamoto" userId="516c4d66ab16f868" providerId="LiveId" clId="{3DBCF2D6-846C-4AC5-B769-15D59CED32E7}"/>
+    <pc:docChg chg="undo custSel addSld modSld sldOrd">
+      <pc:chgData name="kousuke yamamoto" userId="516c4d66ab16f868" providerId="LiveId" clId="{3DBCF2D6-846C-4AC5-B769-15D59CED32E7}" dt="2026-10-06T05:13:21.631" v="53"/>
+      <pc:docMkLst>
+        <pc:docMk/>
+      </pc:docMkLst>
+      <pc:sldChg chg="addSp delSp modSp mod">
+        <pc:chgData name="kousuke yamamoto" userId="516c4d66ab16f868" providerId="LiveId" clId="{3DBCF2D6-846C-4AC5-B769-15D59CED32E7}" dt="2026-10-06T04:59:45.408" v="51" actId="14100"/>
+        <pc:sldMkLst>
+          <pc:docMk/>
+          <pc:sldMk cId="0" sldId="261"/>
+        </pc:sldMkLst>
+        <pc:spChg chg="add del mod">
+          <ac:chgData name="kousuke yamamoto" userId="516c4d66ab16f868" providerId="LiveId" clId="{3DBCF2D6-846C-4AC5-B769-15D59CED32E7}" dt="2026-10-06T04:59:25.854" v="28" actId="478"/>
+          <ac:spMkLst>
+            <pc:docMk/>
+            <pc:sldMk cId="0" sldId="261"/>
+            <ac:spMk id="2" creationId="{F821687B-3030-42F0-A24A-7C58AE191B85}"/>
+          </ac:spMkLst>
+        </pc:spChg>
+        <pc:spChg chg="mod">
+          <ac:chgData name="kousuke yamamoto" userId="516c4d66ab16f868" providerId="LiveId" clId="{3DBCF2D6-846C-4AC5-B769-15D59CED32E7}" dt="2026-10-06T04:59:45.408" v="51" actId="14100"/>
+          <ac:spMkLst>
+            <pc:docMk/>
+            <pc:sldMk cId="0" sldId="261"/>
+            <ac:spMk id="3" creationId="{70EAE7B8-2E7A-4AF5-9F80-324BE3D322C8}"/>
+          </ac:spMkLst>
+        </pc:spChg>
+      </pc:sldChg>
+      <pc:sldChg chg="addSp modSp new mod ord">
+        <pc:chgData name="kousuke yamamoto" userId="516c4d66ab16f868" providerId="LiveId" clId="{3DBCF2D6-846C-4AC5-B769-15D59CED32E7}" dt="2026-10-06T05:13:21.631" v="53"/>
+        <pc:sldMkLst>
+          <pc:docMk/>
+          <pc:sldMk cId="1368519107" sldId="275"/>
+        </pc:sldMkLst>
+        <pc:spChg chg="add mod">
+          <ac:chgData name="kousuke yamamoto" userId="516c4d66ab16f868" providerId="LiveId" clId="{3DBCF2D6-846C-4AC5-B769-15D59CED32E7}" dt="2026-10-06T04:58:09.988" v="20" actId="1076"/>
+          <ac:spMkLst>
+            <pc:docMk/>
+            <pc:sldMk cId="1368519107" sldId="275"/>
+            <ac:spMk id="2" creationId="{833A4E06-EE75-40A7-A1FD-D57D73A87CA8}"/>
+          </ac:spMkLst>
+        </pc:spChg>
+      </pc:sldChg>
+    </pc:docChg>
+  </pc:docChgLst>
+</pc:chgInfo>
+</file>
+
 <file path=ppt/notesMasters/notesMaster1.xml><?xml version="1.0" encoding="utf-8"?>
 <p:notesMaster xmlns:a="http://schemas.openxmlformats.org/drawingml/2006/main" xmlns:r="http://schemas.openxmlformats.org/officeDocument/2006/relationships" xmlns:p="http://schemas.openxmlformats.org/presentationml/2006/main">
   <p:cSld>
@@ -220,7 +273,7 @@
           <a:p>
             <a:fld id="{EA23BABC-04D1-40FF-A826-E108E600BEAD}" type="datetimeFigureOut">
               <a:rPr kumimoji="1" lang="ja-JP" altLang="en-US" smtClean="0"/>
-              <a:t>2026/10/5</a:t>
+              <a:t>2026/10/6</a:t>
             </a:fld>
             <a:endParaRPr kumimoji="1" lang="ja-JP" altLang="en-US"/>
           </a:p>
@@ -584,7 +637,7 @@
           <a:p>
             <a:fld id="{ABD18AC2-2250-4479-91AF-2B392C52A59D}" type="slidenum">
               <a:rPr kumimoji="1" lang="ja-JP" altLang="en-US" smtClean="0"/>
-              <a:t>2</a:t>
+              <a:t>3</a:t>
             </a:fld>
             <a:endParaRPr kumimoji="1" lang="ja-JP" altLang="en-US"/>
           </a:p>
@@ -668,7 +721,7 @@
           <a:p>
             <a:fld id="{ABD18AC2-2250-4479-91AF-2B392C52A59D}" type="slidenum">
               <a:rPr kumimoji="1" lang="ja-JP" altLang="en-US" smtClean="0"/>
-              <a:t>4</a:t>
+              <a:t>5</a:t>
             </a:fld>
             <a:endParaRPr kumimoji="1" lang="ja-JP" altLang="en-US"/>
           </a:p>
@@ -834,7 +887,7 @@
           <a:p>
             <a:fld id="{5BCAD085-E8A6-8845-BD4E-CB4CCA059FC4}" type="datetimeFigureOut">
               <a:rPr lang="en-US" smtClean="0"/>
-              <a:t>10/5/2026</a:t>
+              <a:t>10/6/2026</a:t>
             </a:fld>
             <a:endParaRPr lang="en-US"/>
           </a:p>
@@ -1064,7 +1117,7 @@
           <a:p>
             <a:fld id="{5BCAD085-E8A6-8845-BD4E-CB4CCA059FC4}" type="datetimeFigureOut">
               <a:rPr lang="en-US" smtClean="0"/>
-              <a:t>10/5/2026</a:t>
+              <a:t>10/6/2026</a:t>
             </a:fld>
             <a:endParaRPr lang="en-US"/>
           </a:p>
@@ -1304,7 +1357,7 @@
           <a:p>
             <a:fld id="{5BCAD085-E8A6-8845-BD4E-CB4CCA059FC4}" type="datetimeFigureOut">
               <a:rPr lang="en-US" smtClean="0"/>
-              <a:t>10/5/2026</a:t>
+              <a:t>10/6/2026</a:t>
             </a:fld>
             <a:endParaRPr lang="en-US"/>
           </a:p>
@@ -1534,7 +1587,7 @@
           <a:p>
             <a:fld id="{5BCAD085-E8A6-8845-BD4E-CB4CCA059FC4}" type="datetimeFigureOut">
               <a:rPr lang="en-US" smtClean="0"/>
-              <a:t>10/5/2026</a:t>
+              <a:t>10/6/2026</a:t>
             </a:fld>
             <a:endParaRPr lang="en-US"/>
           </a:p>
@@ -1809,7 +1862,7 @@
           <a:p>
             <a:fld id="{5BCAD085-E8A6-8845-BD4E-CB4CCA059FC4}" type="datetimeFigureOut">
               <a:rPr lang="en-US" smtClean="0"/>
-              <a:t>10/5/2026</a:t>
+              <a:t>10/6/2026</a:t>
             </a:fld>
             <a:endParaRPr lang="en-US"/>
           </a:p>
@@ -2138,7 +2191,7 @@
           <a:p>
             <a:fld id="{5BCAD085-E8A6-8845-BD4E-CB4CCA059FC4}" type="datetimeFigureOut">
               <a:rPr lang="en-US" smtClean="0"/>
-              <a:t>10/5/2026</a:t>
+              <a:t>10/6/2026</a:t>
             </a:fld>
             <a:endParaRPr lang="en-US"/>
           </a:p>
@@ -2614,7 +2667,7 @@
           <a:p>
             <a:fld id="{5BCAD085-E8A6-8845-BD4E-CB4CCA059FC4}" type="datetimeFigureOut">
               <a:rPr lang="en-US" smtClean="0"/>
-              <a:t>10/5/2026</a:t>
+              <a:t>10/6/2026</a:t>
             </a:fld>
             <a:endParaRPr lang="en-US"/>
           </a:p>
@@ -2755,7 +2808,7 @@
           <a:p>
             <a:fld id="{5BCAD085-E8A6-8845-BD4E-CB4CCA059FC4}" type="datetimeFigureOut">
               <a:rPr lang="en-US" smtClean="0"/>
-              <a:t>10/5/2026</a:t>
+              <a:t>10/6/2026</a:t>
             </a:fld>
             <a:endParaRPr lang="en-US"/>
           </a:p>
@@ -2868,7 +2921,7 @@
           <a:p>
             <a:fld id="{5BCAD085-E8A6-8845-BD4E-CB4CCA059FC4}" type="datetimeFigureOut">
               <a:rPr lang="en-US" smtClean="0"/>
-              <a:t>10/5/2026</a:t>
+              <a:t>10/6/2026</a:t>
             </a:fld>
             <a:endParaRPr lang="en-US"/>
           </a:p>
@@ -3211,7 +3264,7 @@
           <a:p>
             <a:fld id="{5BCAD085-E8A6-8845-BD4E-CB4CCA059FC4}" type="datetimeFigureOut">
               <a:rPr lang="en-US" smtClean="0"/>
-              <a:t>10/5/2026</a:t>
+              <a:t>10/6/2026</a:t>
             </a:fld>
             <a:endParaRPr lang="en-US"/>
           </a:p>
@@ -3499,7 +3552,7 @@
           <a:p>
             <a:fld id="{5BCAD085-E8A6-8845-BD4E-CB4CCA059FC4}" type="datetimeFigureOut">
               <a:rPr lang="en-US" smtClean="0"/>
-              <a:t>10/5/2026</a:t>
+              <a:t>10/6/2026</a:t>
             </a:fld>
             <a:endParaRPr lang="en-US"/>
           </a:p>
@@ -3775,7 +3828,7 @@
           <a:p>
             <a:fld id="{5BCAD085-E8A6-8845-BD4E-CB4CCA059FC4}" type="datetimeFigureOut">
               <a:rPr lang="en-US" smtClean="0"/>
-              <a:t>10/5/2026</a:t>
+              <a:t>10/6/2026</a:t>
             </a:fld>
             <a:endParaRPr lang="en-US"/>
           </a:p>
@@ -4332,10 +4385,10 @@
       </p:grpSpPr>
       <p:sp>
         <p:nvSpPr>
-          <p:cNvPr id="2" name="正方形/長方形 1">
-            <a:extLst>
-              <a:ext uri="{FF2B5EF4-FFF2-40B4-BE49-F238E27FC236}">
-                <a16:creationId xmlns:a16="http://schemas.microsoft.com/office/drawing/2014/main" id="{94BBD830-09D9-4A07-A52B-EC8B6E69593B}"/>
+          <p:cNvPr id="4" name="正方形/長方形 3">
+            <a:extLst>
+              <a:ext uri="{FF2B5EF4-FFF2-40B4-BE49-F238E27FC236}">
+                <a16:creationId xmlns:a16="http://schemas.microsoft.com/office/drawing/2014/main" id="{6840A768-F67B-4920-B60C-4E4E518CFD24}"/>
               </a:ext>
             </a:extLst>
           </p:cNvPr>
@@ -4344,27 +4397,168 @@
         </p:nvSpPr>
         <p:spPr>
           <a:xfrm>
-            <a:off x="0" y="0"/>
-            <a:ext cx="12192000" cy="6858000"/>
+            <a:off x="184014" y="453350"/>
+            <a:ext cx="5911986" cy="2854054"/>
           </a:xfrm>
           <a:prstGeom prst="rect">
             <a:avLst/>
           </a:prstGeom>
+          <a:ln>
+            <a:noFill/>
+          </a:ln>
         </p:spPr>
         <p:style>
           <a:lnRef idx="2">
-            <a:schemeClr val="dk1">
-              <a:shade val="50000"/>
-            </a:schemeClr>
+            <a:schemeClr val="accent6"/>
           </a:lnRef>
           <a:fillRef idx="1">
+            <a:schemeClr val="lt1"/>
+          </a:fillRef>
+          <a:effectRef idx="0">
+            <a:schemeClr val="accent6"/>
+          </a:effectRef>
+          <a:fontRef idx="minor">
             <a:schemeClr val="dk1"/>
+          </a:fontRef>
+        </p:style>
+        <p:txBody>
+          <a:bodyPr rtlCol="0" anchor="ctr"/>
+          <a:lstStyle/>
+          <a:p>
+            <a:pPr algn="ctr"/>
+            <a:r>
+              <a:rPr lang="ja-JP" altLang="en-US" sz="4800" dirty="0">
+                <a:latin typeface="メイリオ" panose="020B0604030504040204" pitchFamily="50" charset="-128"/>
+                <a:ea typeface="メイリオ" panose="020B0604030504040204" pitchFamily="50" charset="-128"/>
+              </a:rPr>
+              <a:t>既存のゲームとの</a:t>
+            </a:r>
+            <a:endParaRPr lang="en-US" altLang="ja-JP" sz="4800" dirty="0">
+              <a:latin typeface="メイリオ" panose="020B0604030504040204" pitchFamily="50" charset="-128"/>
+              <a:ea typeface="メイリオ" panose="020B0604030504040204" pitchFamily="50" charset="-128"/>
+            </a:endParaRPr>
+          </a:p>
+          <a:p>
+            <a:pPr algn="ctr"/>
+            <a:r>
+              <a:rPr lang="ja-JP" altLang="en-US" sz="4800" dirty="0">
+                <a:latin typeface="メイリオ" panose="020B0604030504040204" pitchFamily="50" charset="-128"/>
+                <a:ea typeface="メイリオ" panose="020B0604030504040204" pitchFamily="50" charset="-128"/>
+              </a:rPr>
+              <a:t>差別点</a:t>
+            </a:r>
+            <a:endParaRPr lang="en-US" altLang="ja-JP" sz="4800" dirty="0">
+              <a:latin typeface="メイリオ" panose="020B0604030504040204" pitchFamily="50" charset="-128"/>
+              <a:ea typeface="メイリオ" panose="020B0604030504040204" pitchFamily="50" charset="-128"/>
+            </a:endParaRPr>
+          </a:p>
+          <a:p>
+            <a:pPr algn="ctr"/>
+            <a:endParaRPr kumimoji="1" lang="ja-JP" altLang="en-US" sz="4800" dirty="0">
+              <a:latin typeface="メイリオ" panose="020B0604030504040204" pitchFamily="50" charset="-128"/>
+              <a:ea typeface="メイリオ" panose="020B0604030504040204" pitchFamily="50" charset="-128"/>
+            </a:endParaRPr>
+          </a:p>
+        </p:txBody>
+      </p:sp>
+      <p:pic>
+        <p:nvPicPr>
+          <p:cNvPr id="5" name="図 4">
+            <a:extLst>
+              <a:ext uri="{FF2B5EF4-FFF2-40B4-BE49-F238E27FC236}">
+                <a16:creationId xmlns:a16="http://schemas.microsoft.com/office/drawing/2014/main" id="{3258D720-4F32-47AB-A04F-C0226CFDB304}"/>
+              </a:ext>
+            </a:extLst>
+          </p:cNvPr>
+          <p:cNvPicPr>
+            <a:picLocks noChangeAspect="1"/>
+          </p:cNvPicPr>
+          <p:nvPr/>
+        </p:nvPicPr>
+        <p:blipFill>
+          <a:blip r:embed="rId2"/>
+          <a:stretch>
+            <a:fillRect/>
+          </a:stretch>
+        </p:blipFill>
+        <p:spPr>
+          <a:xfrm>
+            <a:off x="5911986" y="2348834"/>
+            <a:ext cx="6280014" cy="3981450"/>
+          </a:xfrm>
+          <a:prstGeom prst="rect">
+            <a:avLst/>
+          </a:prstGeom>
+        </p:spPr>
+      </p:pic>
+      <p:pic>
+        <p:nvPicPr>
+          <p:cNvPr id="8" name="図 7">
+            <a:extLst>
+              <a:ext uri="{FF2B5EF4-FFF2-40B4-BE49-F238E27FC236}">
+                <a16:creationId xmlns:a16="http://schemas.microsoft.com/office/drawing/2014/main" id="{E15A6B13-698C-466F-8857-1D17DD41414E}"/>
+              </a:ext>
+            </a:extLst>
+          </p:cNvPr>
+          <p:cNvPicPr>
+            <a:picLocks noChangeAspect="1"/>
+          </p:cNvPicPr>
+          <p:nvPr/>
+        </p:nvPicPr>
+        <p:blipFill>
+          <a:blip r:embed="rId3"/>
+          <a:stretch>
+            <a:fillRect/>
+          </a:stretch>
+        </p:blipFill>
+        <p:spPr>
+          <a:xfrm>
+            <a:off x="0" y="2244059"/>
+            <a:ext cx="5911986" cy="4086225"/>
+          </a:xfrm>
+          <a:prstGeom prst="rect">
+            <a:avLst/>
+          </a:prstGeom>
+        </p:spPr>
+      </p:pic>
+      <p:sp>
+        <p:nvSpPr>
+          <p:cNvPr id="9" name="正方形/長方形 8">
+            <a:extLst>
+              <a:ext uri="{FF2B5EF4-FFF2-40B4-BE49-F238E27FC236}">
+                <a16:creationId xmlns:a16="http://schemas.microsoft.com/office/drawing/2014/main" id="{AE2D33BF-6DBF-49C0-BADC-46794B569439}"/>
+              </a:ext>
+            </a:extLst>
+          </p:cNvPr>
+          <p:cNvSpPr/>
+          <p:nvPr/>
+        </p:nvSpPr>
+        <p:spPr>
+          <a:xfrm>
+            <a:off x="7143749" y="757083"/>
+            <a:ext cx="3571875" cy="928841"/>
+          </a:xfrm>
+          <a:prstGeom prst="rect">
+            <a:avLst/>
+          </a:prstGeom>
+          <a:ln>
+            <a:solidFill>
+              <a:schemeClr val="bg1"/>
+            </a:solidFill>
+          </a:ln>
+        </p:spPr>
+        <p:style>
+          <a:lnRef idx="2">
+            <a:schemeClr val="dk1"/>
+          </a:lnRef>
+          <a:fillRef idx="1">
+            <a:schemeClr val="lt1"/>
           </a:fillRef>
           <a:effectRef idx="0">
             <a:schemeClr val="dk1"/>
           </a:effectRef>
           <a:fontRef idx="minor">
-            <a:schemeClr val="lt1"/>
+            <a:schemeClr val="dk1"/>
           </a:fontRef>
         </p:style>
         <p:txBody>
@@ -4372,58 +4566,15 @@
           <a:lstStyle/>
           <a:p>
             <a:pPr algn="ctr"/>
-            <a:endParaRPr kumimoji="1" lang="ja-JP" altLang="en-US"/>
-          </a:p>
-        </p:txBody>
-      </p:sp>
-      <p:sp>
-        <p:nvSpPr>
-          <p:cNvPr id="3" name="正方形/長方形 2">
-            <a:extLst>
-              <a:ext uri="{FF2B5EF4-FFF2-40B4-BE49-F238E27FC236}">
-                <a16:creationId xmlns:a16="http://schemas.microsoft.com/office/drawing/2014/main" id="{FB5A4323-F76A-4BC8-AF9B-DBF0CF5F1BDB}"/>
-              </a:ext>
-            </a:extLst>
-          </p:cNvPr>
-          <p:cNvSpPr/>
-          <p:nvPr/>
-        </p:nvSpPr>
-        <p:spPr>
-          <a:xfrm>
-            <a:off x="3724275" y="2162175"/>
-            <a:ext cx="6076950" cy="2657475"/>
-          </a:xfrm>
-          <a:prstGeom prst="rect">
-            <a:avLst/>
-          </a:prstGeom>
-        </p:spPr>
-        <p:style>
-          <a:lnRef idx="2">
-            <a:schemeClr val="dk1">
-              <a:shade val="50000"/>
-            </a:schemeClr>
-          </a:lnRef>
-          <a:fillRef idx="1">
-            <a:schemeClr val="dk1"/>
-          </a:fillRef>
-          <a:effectRef idx="0">
-            <a:schemeClr val="dk1"/>
-          </a:effectRef>
-          <a:fontRef idx="minor">
-            <a:schemeClr val="lt1"/>
-          </a:fontRef>
-        </p:style>
-        <p:txBody>
-          <a:bodyPr rtlCol="0" anchor="ctr"/>
-          <a:lstStyle/>
-          <a:p>
-            <a:pPr algn="ctr"/>
-            <a:r>
-              <a:rPr kumimoji="1" lang="ja-JP" altLang="en-US" sz="9600" dirty="0">
+            <a:r>
+              <a:rPr kumimoji="1" lang="ja-JP" altLang="en-US" sz="4400" dirty="0">
+                <a:solidFill>
+                  <a:srgbClr val="FF0000"/>
+                </a:solidFill>
                 <a:latin typeface="メイリオ" panose="020B0604030504040204" pitchFamily="50" charset="-128"/>
                 <a:ea typeface="メイリオ" panose="020B0604030504040204" pitchFamily="50" charset="-128"/>
               </a:rPr>
-              <a:t>終わり</a:t>
+              <a:t>このゲームは筆目線</a:t>
             </a:r>
           </a:p>
         </p:txBody>
@@ -4431,7 +4582,7 @@
     </p:spTree>
     <p:extLst>
       <p:ext uri="{BB962C8B-B14F-4D97-AF65-F5344CB8AC3E}">
-        <p14:creationId xmlns:p14="http://schemas.microsoft.com/office/powerpoint/2010/main" val="4151086904"/>
+        <p14:creationId xmlns:p14="http://schemas.microsoft.com/office/powerpoint/2010/main" val="1417576500"/>
       </p:ext>
     </p:extLst>
   </p:cSld>
@@ -4463,7 +4614,7 @@
           <p:cNvPr id="2" name="正方形/長方形 1">
             <a:extLst>
               <a:ext uri="{FF2B5EF4-FFF2-40B4-BE49-F238E27FC236}">
-                <a16:creationId xmlns:a16="http://schemas.microsoft.com/office/drawing/2014/main" id="{1A56CE55-53D8-4113-BD6F-C0AB21771132}"/>
+                <a16:creationId xmlns:a16="http://schemas.microsoft.com/office/drawing/2014/main" id="{94BBD830-09D9-4A07-A52B-EC8B6E69593B}"/>
               </a:ext>
             </a:extLst>
           </p:cNvPr>
@@ -4472,151 +4623,27 @@
         </p:nvSpPr>
         <p:spPr>
           <a:xfrm>
-            <a:off x="184013" y="560120"/>
-            <a:ext cx="8308233" cy="1138136"/>
+            <a:off x="0" y="0"/>
+            <a:ext cx="12192000" cy="6858000"/>
           </a:xfrm>
           <a:prstGeom prst="rect">
             <a:avLst/>
           </a:prstGeom>
-          <a:ln>
-            <a:noFill/>
-          </a:ln>
         </p:spPr>
         <p:style>
           <a:lnRef idx="2">
-            <a:schemeClr val="accent6"/>
+            <a:schemeClr val="dk1">
+              <a:shade val="50000"/>
+            </a:schemeClr>
           </a:lnRef>
           <a:fillRef idx="1">
-            <a:schemeClr val="lt1"/>
-          </a:fillRef>
-          <a:effectRef idx="0">
-            <a:schemeClr val="accent6"/>
-          </a:effectRef>
-          <a:fontRef idx="minor">
             <a:schemeClr val="dk1"/>
-          </a:fontRef>
-        </p:style>
-        <p:txBody>
-          <a:bodyPr rtlCol="0" anchor="t"/>
-          <a:lstStyle/>
-          <a:p>
-            <a:pPr algn="r">
-              <a:lnSpc>
-                <a:spcPct val="150000"/>
-              </a:lnSpc>
-            </a:pPr>
-            <a:r>
-              <a:rPr kumimoji="1" lang="ja-JP" altLang="en-US" sz="4800" dirty="0">
-                <a:latin typeface="メイリオ" panose="020B0604030504040204" pitchFamily="50" charset="-128"/>
-                <a:ea typeface="メイリオ" panose="020B0604030504040204" pitchFamily="50" charset="-128"/>
-              </a:rPr>
-              <a:t>このゲームで一番面白い瞬間</a:t>
-            </a:r>
-            <a:endParaRPr kumimoji="1" lang="en-US" altLang="ja-JP" sz="4800" dirty="0">
-              <a:latin typeface="メイリオ" panose="020B0604030504040204" pitchFamily="50" charset="-128"/>
-              <a:ea typeface="メイリオ" panose="020B0604030504040204" pitchFamily="50" charset="-128"/>
-            </a:endParaRPr>
-          </a:p>
-          <a:p>
-            <a:pPr algn="r">
-              <a:lnSpc>
-                <a:spcPct val="150000"/>
-              </a:lnSpc>
-            </a:pPr>
-            <a:endParaRPr kumimoji="1" lang="en-US" altLang="ja-JP" sz="4800" dirty="0">
-              <a:latin typeface="メイリオ" panose="020B0604030504040204" pitchFamily="50" charset="-128"/>
-              <a:ea typeface="メイリオ" panose="020B0604030504040204" pitchFamily="50" charset="-128"/>
-            </a:endParaRPr>
-          </a:p>
-          <a:p>
-            <a:pPr algn="r">
-              <a:lnSpc>
-                <a:spcPct val="150000"/>
-              </a:lnSpc>
-            </a:pPr>
-            <a:endParaRPr kumimoji="1" lang="ja-JP" altLang="en-US" sz="4800" dirty="0">
-              <a:latin typeface="メイリオ" panose="020B0604030504040204" pitchFamily="50" charset="-128"/>
-              <a:ea typeface="メイリオ" panose="020B0604030504040204" pitchFamily="50" charset="-128"/>
-            </a:endParaRPr>
-          </a:p>
-        </p:txBody>
-      </p:sp>
-      <p:sp>
-        <p:nvSpPr>
-          <p:cNvPr id="3" name="テキスト ボックス 2">
-            <a:extLst>
-              <a:ext uri="{FF2B5EF4-FFF2-40B4-BE49-F238E27FC236}">
-                <a16:creationId xmlns:a16="http://schemas.microsoft.com/office/drawing/2014/main" id="{BAC67377-142B-4D87-834E-4FEDAD2A2B5F}"/>
-              </a:ext>
-            </a:extLst>
-          </p:cNvPr>
-          <p:cNvSpPr txBox="1"/>
-          <p:nvPr/>
-        </p:nvSpPr>
-        <p:spPr>
-          <a:xfrm>
-            <a:off x="1847379" y="5248071"/>
-            <a:ext cx="6094378" cy="369332"/>
-          </a:xfrm>
-          <a:prstGeom prst="rect">
-            <a:avLst/>
-          </a:prstGeom>
-          <a:noFill/>
-        </p:spPr>
-        <p:txBody>
-          <a:bodyPr wrap="square">
-            <a:spAutoFit/>
-          </a:bodyPr>
-          <a:lstStyle/>
-          <a:p>
-            <a:pPr algn="ctr"/>
-            <a:r>
-              <a:rPr lang="ja-JP" altLang="en-US" dirty="0">
-                <a:latin typeface="メイリオ" panose="020B0604030504040204" pitchFamily="50" charset="-128"/>
-                <a:ea typeface="メイリオ" panose="020B0604030504040204" pitchFamily="50" charset="-128"/>
-              </a:rPr>
-              <a:t>なにをさせたいのか　どんな気持ちにさせたい</a:t>
-            </a:r>
-            <a:endParaRPr kumimoji="1" lang="en-US" altLang="ja-JP" sz="1800" dirty="0">
-              <a:latin typeface="メイリオ" panose="020B0604030504040204" pitchFamily="50" charset="-128"/>
-              <a:ea typeface="メイリオ" panose="020B0604030504040204" pitchFamily="50" charset="-128"/>
-            </a:endParaRPr>
-          </a:p>
-        </p:txBody>
-      </p:sp>
-      <p:sp>
-        <p:nvSpPr>
-          <p:cNvPr id="4" name="正方形/長方形 3">
-            <a:extLst>
-              <a:ext uri="{FF2B5EF4-FFF2-40B4-BE49-F238E27FC236}">
-                <a16:creationId xmlns:a16="http://schemas.microsoft.com/office/drawing/2014/main" id="{FDE00C1E-5F09-44B3-9D60-249CD5642B5B}"/>
-              </a:ext>
-            </a:extLst>
-          </p:cNvPr>
-          <p:cNvSpPr/>
-          <p:nvPr/>
-        </p:nvSpPr>
-        <p:spPr>
-          <a:xfrm>
-            <a:off x="515158" y="3037741"/>
-            <a:ext cx="2947481" cy="914400"/>
-          </a:xfrm>
-          <a:prstGeom prst="rect">
-            <a:avLst/>
-          </a:prstGeom>
-        </p:spPr>
-        <p:style>
-          <a:lnRef idx="2">
-            <a:schemeClr val="dk1"/>
-          </a:lnRef>
-          <a:fillRef idx="1">
-            <a:schemeClr val="lt1"/>
           </a:fillRef>
           <a:effectRef idx="0">
             <a:schemeClr val="dk1"/>
           </a:effectRef>
           <a:fontRef idx="minor">
-            <a:schemeClr val="dk1"/>
+            <a:schemeClr val="lt1"/>
           </a:fontRef>
         </p:style>
         <p:txBody>
@@ -4624,36 +4651,16 @@
           <a:lstStyle/>
           <a:p>
             <a:pPr algn="ctr"/>
-            <a:r>
-              <a:rPr kumimoji="1" lang="ja-JP" altLang="en-US" dirty="0">
-                <a:latin typeface="メイリオ" panose="020B0604030504040204" pitchFamily="50" charset="-128"/>
-                <a:ea typeface="メイリオ" panose="020B0604030504040204" pitchFamily="50" charset="-128"/>
-              </a:rPr>
-              <a:t>自分の書いた文字に</a:t>
-            </a:r>
-            <a:endParaRPr kumimoji="1" lang="en-US" altLang="ja-JP" dirty="0">
-              <a:latin typeface="メイリオ" panose="020B0604030504040204" pitchFamily="50" charset="-128"/>
-              <a:ea typeface="メイリオ" panose="020B0604030504040204" pitchFamily="50" charset="-128"/>
-            </a:endParaRPr>
-          </a:p>
-          <a:p>
-            <a:pPr algn="ctr"/>
-            <a:r>
-              <a:rPr kumimoji="1" lang="ja-JP" altLang="en-US" dirty="0">
-                <a:latin typeface="メイリオ" panose="020B0604030504040204" pitchFamily="50" charset="-128"/>
-                <a:ea typeface="メイリオ" panose="020B0604030504040204" pitchFamily="50" charset="-128"/>
-              </a:rPr>
-              <a:t>満足できるとき</a:t>
-            </a:r>
-          </a:p>
-        </p:txBody>
-      </p:sp>
-      <p:sp>
-        <p:nvSpPr>
-          <p:cNvPr id="7" name="正方形/長方形 6">
-            <a:extLst>
-              <a:ext uri="{FF2B5EF4-FFF2-40B4-BE49-F238E27FC236}">
-                <a16:creationId xmlns:a16="http://schemas.microsoft.com/office/drawing/2014/main" id="{5507A22D-974F-4D2F-9E4C-0869B25B6561}"/>
+            <a:endParaRPr kumimoji="1" lang="ja-JP" altLang="en-US"/>
+          </a:p>
+        </p:txBody>
+      </p:sp>
+      <p:sp>
+        <p:nvSpPr>
+          <p:cNvPr id="3" name="正方形/長方形 2">
+            <a:extLst>
+              <a:ext uri="{FF2B5EF4-FFF2-40B4-BE49-F238E27FC236}">
+                <a16:creationId xmlns:a16="http://schemas.microsoft.com/office/drawing/2014/main" id="{FB5A4323-F76A-4BC8-AF9B-DBF0CF5F1BDB}"/>
               </a:ext>
             </a:extLst>
           </p:cNvPr>
@@ -4662,8 +4669,8 @@
         </p:nvSpPr>
         <p:spPr>
           <a:xfrm>
-            <a:off x="8444013" y="4149085"/>
-            <a:ext cx="2947481" cy="914400"/>
+            <a:off x="3724275" y="2162175"/>
+            <a:ext cx="6076950" cy="2657475"/>
           </a:xfrm>
           <a:prstGeom prst="rect">
             <a:avLst/>
@@ -4671,16 +4678,18 @@
         </p:spPr>
         <p:style>
           <a:lnRef idx="2">
-            <a:schemeClr val="dk1"/>
+            <a:schemeClr val="dk1">
+              <a:shade val="50000"/>
+            </a:schemeClr>
           </a:lnRef>
           <a:fillRef idx="1">
-            <a:schemeClr val="lt1"/>
+            <a:schemeClr val="dk1"/>
           </a:fillRef>
           <a:effectRef idx="0">
             <a:schemeClr val="dk1"/>
           </a:effectRef>
           <a:fontRef idx="minor">
-            <a:schemeClr val="dk1"/>
+            <a:schemeClr val="lt1"/>
           </a:fontRef>
         </p:style>
         <p:txBody>
@@ -4689,404 +4698,19 @@
           <a:p>
             <a:pPr algn="ctr"/>
             <a:r>
-              <a:rPr lang="ja-JP" altLang="en-US" dirty="0">
+              <a:rPr kumimoji="1" lang="ja-JP" altLang="en-US" sz="9600" dirty="0">
                 <a:latin typeface="メイリオ" panose="020B0604030504040204" pitchFamily="50" charset="-128"/>
                 <a:ea typeface="メイリオ" panose="020B0604030504040204" pitchFamily="50" charset="-128"/>
               </a:rPr>
-              <a:t>達成感・満足感・誇らしさ</a:t>
-            </a:r>
-            <a:endParaRPr kumimoji="1" lang="en-US" altLang="ja-JP" dirty="0">
-              <a:latin typeface="メイリオ" panose="020B0604030504040204" pitchFamily="50" charset="-128"/>
-              <a:ea typeface="メイリオ" panose="020B0604030504040204" pitchFamily="50" charset="-128"/>
-            </a:endParaRPr>
-          </a:p>
-        </p:txBody>
-      </p:sp>
-      <p:sp>
-        <p:nvSpPr>
-          <p:cNvPr id="8" name="矢印: 下 7">
-            <a:extLst>
-              <a:ext uri="{FF2B5EF4-FFF2-40B4-BE49-F238E27FC236}">
-                <a16:creationId xmlns:a16="http://schemas.microsoft.com/office/drawing/2014/main" id="{B50A8EDE-AF58-4584-A9E5-71C8FCCEDEDD}"/>
-              </a:ext>
-            </a:extLst>
-          </p:cNvPr>
-          <p:cNvSpPr/>
-          <p:nvPr/>
-        </p:nvSpPr>
-        <p:spPr>
-          <a:xfrm>
-            <a:off x="1605063" y="1738000"/>
-            <a:ext cx="484632" cy="978408"/>
-          </a:xfrm>
-          <a:prstGeom prst="downArrow">
-            <a:avLst/>
-          </a:prstGeom>
-          <a:solidFill>
-            <a:srgbClr val="FF0000"/>
-          </a:solidFill>
-        </p:spPr>
-        <p:style>
-          <a:lnRef idx="2">
-            <a:schemeClr val="accent1">
-              <a:shade val="50000"/>
-            </a:schemeClr>
-          </a:lnRef>
-          <a:fillRef idx="1">
-            <a:schemeClr val="accent1"/>
-          </a:fillRef>
-          <a:effectRef idx="0">
-            <a:schemeClr val="accent1"/>
-          </a:effectRef>
-          <a:fontRef idx="minor">
-            <a:schemeClr val="lt1"/>
-          </a:fontRef>
-        </p:style>
-        <p:txBody>
-          <a:bodyPr rtlCol="0" anchor="ctr"/>
-          <a:lstStyle/>
-          <a:p>
-            <a:pPr algn="ctr"/>
-            <a:endParaRPr kumimoji="1" lang="ja-JP" altLang="en-US" dirty="0"/>
-          </a:p>
-        </p:txBody>
-      </p:sp>
-      <p:sp>
-        <p:nvSpPr>
-          <p:cNvPr id="9" name="正方形/長方形 8">
-            <a:extLst>
-              <a:ext uri="{FF2B5EF4-FFF2-40B4-BE49-F238E27FC236}">
-                <a16:creationId xmlns:a16="http://schemas.microsoft.com/office/drawing/2014/main" id="{C7EA132F-B1B2-4B4C-897B-F2F5D7F95870}"/>
-              </a:ext>
-            </a:extLst>
-          </p:cNvPr>
-          <p:cNvSpPr/>
-          <p:nvPr/>
-        </p:nvSpPr>
-        <p:spPr>
-          <a:xfrm>
-            <a:off x="7966951" y="1425263"/>
-            <a:ext cx="3901603" cy="1568544"/>
-          </a:xfrm>
-          <a:prstGeom prst="rect">
-            <a:avLst/>
-          </a:prstGeom>
-          <a:ln>
-            <a:noFill/>
-          </a:ln>
-        </p:spPr>
-        <p:style>
-          <a:lnRef idx="2">
-            <a:schemeClr val="accent6"/>
-          </a:lnRef>
-          <a:fillRef idx="1">
-            <a:schemeClr val="lt1"/>
-          </a:fillRef>
-          <a:effectRef idx="0">
-            <a:schemeClr val="accent6"/>
-          </a:effectRef>
-          <a:fontRef idx="minor">
-            <a:schemeClr val="dk1"/>
-          </a:fontRef>
-        </p:style>
-        <p:txBody>
-          <a:bodyPr rtlCol="0" anchor="ctr"/>
-          <a:lstStyle/>
-          <a:p>
-            <a:pPr algn="ctr"/>
-            <a:endParaRPr kumimoji="1" lang="en-US" altLang="ja-JP" sz="4800" dirty="0">
-              <a:latin typeface="メイリオ" panose="020B0604030504040204" pitchFamily="50" charset="-128"/>
-              <a:ea typeface="メイリオ" panose="020B0604030504040204" pitchFamily="50" charset="-128"/>
-            </a:endParaRPr>
-          </a:p>
-          <a:p>
-            <a:pPr algn="ctr"/>
-            <a:r>
-              <a:rPr kumimoji="1" lang="ja-JP" altLang="en-US" sz="4800" dirty="0">
-                <a:latin typeface="メイリオ" panose="020B0604030504040204" pitchFamily="50" charset="-128"/>
-                <a:ea typeface="メイリオ" panose="020B0604030504040204" pitchFamily="50" charset="-128"/>
-              </a:rPr>
-              <a:t>プレイヤーが</a:t>
-            </a:r>
-            <a:endParaRPr kumimoji="1" lang="en-US" altLang="ja-JP" sz="4800" dirty="0">
-              <a:latin typeface="メイリオ" panose="020B0604030504040204" pitchFamily="50" charset="-128"/>
-              <a:ea typeface="メイリオ" panose="020B0604030504040204" pitchFamily="50" charset="-128"/>
-            </a:endParaRPr>
-          </a:p>
-          <a:p>
-            <a:pPr algn="ctr"/>
-            <a:r>
-              <a:rPr kumimoji="1" lang="ja-JP" altLang="en-US" sz="4800" dirty="0">
-                <a:latin typeface="メイリオ" panose="020B0604030504040204" pitchFamily="50" charset="-128"/>
-                <a:ea typeface="メイリオ" panose="020B0604030504040204" pitchFamily="50" charset="-128"/>
-              </a:rPr>
-              <a:t>どう感じるか</a:t>
-            </a:r>
-            <a:endParaRPr kumimoji="1" lang="en-US" altLang="ja-JP" sz="4800" dirty="0">
-              <a:latin typeface="メイリオ" panose="020B0604030504040204" pitchFamily="50" charset="-128"/>
-              <a:ea typeface="メイリオ" panose="020B0604030504040204" pitchFamily="50" charset="-128"/>
-            </a:endParaRPr>
-          </a:p>
-          <a:p>
-            <a:pPr algn="ctr"/>
-            <a:endParaRPr kumimoji="1" lang="ja-JP" altLang="en-US" sz="4800" dirty="0">
-              <a:latin typeface="メイリオ" panose="020B0604030504040204" pitchFamily="50" charset="-128"/>
-              <a:ea typeface="メイリオ" panose="020B0604030504040204" pitchFamily="50" charset="-128"/>
-            </a:endParaRPr>
-          </a:p>
-        </p:txBody>
-      </p:sp>
-      <p:sp>
-        <p:nvSpPr>
-          <p:cNvPr id="5" name="矢印: 下 4">
-            <a:extLst>
-              <a:ext uri="{FF2B5EF4-FFF2-40B4-BE49-F238E27FC236}">
-                <a16:creationId xmlns:a16="http://schemas.microsoft.com/office/drawing/2014/main" id="{837F0AB4-6508-4619-9F4E-827A6B1D64EE}"/>
-              </a:ext>
-            </a:extLst>
-          </p:cNvPr>
-          <p:cNvSpPr/>
-          <p:nvPr/>
-        </p:nvSpPr>
-        <p:spPr>
-          <a:xfrm>
-            <a:off x="3220323" y="5657358"/>
-            <a:ext cx="484632" cy="464058"/>
-          </a:xfrm>
-          <a:prstGeom prst="downArrow">
-            <a:avLst/>
-          </a:prstGeom>
-          <a:solidFill>
-            <a:srgbClr val="FF0000"/>
-          </a:solidFill>
-        </p:spPr>
-        <p:style>
-          <a:lnRef idx="2">
-            <a:schemeClr val="accent1">
-              <a:shade val="50000"/>
-            </a:schemeClr>
-          </a:lnRef>
-          <a:fillRef idx="1">
-            <a:schemeClr val="accent1"/>
-          </a:fillRef>
-          <a:effectRef idx="0">
-            <a:schemeClr val="accent1"/>
-          </a:effectRef>
-          <a:fontRef idx="minor">
-            <a:schemeClr val="lt1"/>
-          </a:fontRef>
-        </p:style>
-        <p:txBody>
-          <a:bodyPr rtlCol="0" anchor="ctr"/>
-          <a:lstStyle/>
-          <a:p>
-            <a:pPr algn="ctr"/>
-            <a:endParaRPr kumimoji="1" lang="ja-JP" altLang="en-US"/>
-          </a:p>
-        </p:txBody>
-      </p:sp>
-      <p:sp>
-        <p:nvSpPr>
-          <p:cNvPr id="11" name="矢印: 下 10">
-            <a:extLst>
-              <a:ext uri="{FF2B5EF4-FFF2-40B4-BE49-F238E27FC236}">
-                <a16:creationId xmlns:a16="http://schemas.microsoft.com/office/drawing/2014/main" id="{905904F0-FEAE-48AF-B206-826D19493D03}"/>
-              </a:ext>
-            </a:extLst>
-          </p:cNvPr>
-          <p:cNvSpPr/>
-          <p:nvPr/>
-        </p:nvSpPr>
-        <p:spPr>
-          <a:xfrm>
-            <a:off x="5487273" y="5657358"/>
-            <a:ext cx="484632" cy="464058"/>
-          </a:xfrm>
-          <a:prstGeom prst="downArrow">
-            <a:avLst/>
-          </a:prstGeom>
-          <a:solidFill>
-            <a:srgbClr val="FF0000"/>
-          </a:solidFill>
-        </p:spPr>
-        <p:style>
-          <a:lnRef idx="2">
-            <a:schemeClr val="accent1">
-              <a:shade val="50000"/>
-            </a:schemeClr>
-          </a:lnRef>
-          <a:fillRef idx="1">
-            <a:schemeClr val="accent1"/>
-          </a:fillRef>
-          <a:effectRef idx="0">
-            <a:schemeClr val="accent1"/>
-          </a:effectRef>
-          <a:fontRef idx="minor">
-            <a:schemeClr val="lt1"/>
-          </a:fontRef>
-        </p:style>
-        <p:txBody>
-          <a:bodyPr rtlCol="0" anchor="ctr"/>
-          <a:lstStyle/>
-          <a:p>
-            <a:pPr algn="ctr"/>
-            <a:endParaRPr kumimoji="1" lang="ja-JP" altLang="en-US"/>
-          </a:p>
-        </p:txBody>
-      </p:sp>
-      <p:sp>
-        <p:nvSpPr>
-          <p:cNvPr id="12" name="正方形/長方形 11">
-            <a:extLst>
-              <a:ext uri="{FF2B5EF4-FFF2-40B4-BE49-F238E27FC236}">
-                <a16:creationId xmlns:a16="http://schemas.microsoft.com/office/drawing/2014/main" id="{1D1C65D6-BC17-41B6-8B2F-678CFB6D3777}"/>
-              </a:ext>
-            </a:extLst>
-          </p:cNvPr>
-          <p:cNvSpPr/>
-          <p:nvPr/>
-        </p:nvSpPr>
-        <p:spPr>
-          <a:xfrm>
-            <a:off x="5353049" y="6172200"/>
-            <a:ext cx="695325" cy="571500"/>
-          </a:xfrm>
-          <a:prstGeom prst="rect">
-            <a:avLst/>
-          </a:prstGeom>
-        </p:spPr>
-        <p:style>
-          <a:lnRef idx="2">
-            <a:schemeClr val="dk1"/>
-          </a:lnRef>
-          <a:fillRef idx="1">
-            <a:schemeClr val="lt1"/>
-          </a:fillRef>
-          <a:effectRef idx="0">
-            <a:schemeClr val="dk1"/>
-          </a:effectRef>
-          <a:fontRef idx="minor">
-            <a:schemeClr val="dk1"/>
-          </a:fontRef>
-        </p:style>
-        <p:txBody>
-          <a:bodyPr rtlCol="0" anchor="ctr"/>
-          <a:lstStyle/>
-          <a:p>
-            <a:pPr algn="ctr"/>
-            <a:r>
-              <a:rPr kumimoji="1" lang="ja-JP" altLang="en-US" dirty="0">
-                <a:latin typeface="メイリオ" panose="020B0604030504040204" pitchFamily="50" charset="-128"/>
-                <a:ea typeface="メイリオ" panose="020B0604030504040204" pitchFamily="50" charset="-128"/>
-              </a:rPr>
-              <a:t>満足</a:t>
-            </a:r>
-          </a:p>
-        </p:txBody>
-      </p:sp>
-      <p:sp>
-        <p:nvSpPr>
-          <p:cNvPr id="13" name="正方形/長方形 12">
-            <a:extLst>
-              <a:ext uri="{FF2B5EF4-FFF2-40B4-BE49-F238E27FC236}">
-                <a16:creationId xmlns:a16="http://schemas.microsoft.com/office/drawing/2014/main" id="{4AF0D3BD-546E-4F94-BF34-BE6901DB6F25}"/>
-              </a:ext>
-            </a:extLst>
-          </p:cNvPr>
-          <p:cNvSpPr/>
-          <p:nvPr/>
-        </p:nvSpPr>
-        <p:spPr>
-          <a:xfrm>
-            <a:off x="3133725" y="6121416"/>
-            <a:ext cx="695325" cy="571500"/>
-          </a:xfrm>
-          <a:prstGeom prst="rect">
-            <a:avLst/>
-          </a:prstGeom>
-        </p:spPr>
-        <p:style>
-          <a:lnRef idx="2">
-            <a:schemeClr val="dk1"/>
-          </a:lnRef>
-          <a:fillRef idx="1">
-            <a:schemeClr val="lt1"/>
-          </a:fillRef>
-          <a:effectRef idx="0">
-            <a:schemeClr val="dk1"/>
-          </a:effectRef>
-          <a:fontRef idx="minor">
-            <a:schemeClr val="dk1"/>
-          </a:fontRef>
-        </p:style>
-        <p:txBody>
-          <a:bodyPr rtlCol="0" anchor="ctr"/>
-          <a:lstStyle/>
-          <a:p>
-            <a:pPr algn="ctr"/>
-            <a:r>
-              <a:rPr kumimoji="1" lang="ja-JP" altLang="en-US" dirty="0">
-                <a:latin typeface="メイリオ" panose="020B0604030504040204" pitchFamily="50" charset="-128"/>
-                <a:ea typeface="メイリオ" panose="020B0604030504040204" pitchFamily="50" charset="-128"/>
-              </a:rPr>
-              <a:t>書道</a:t>
-            </a:r>
-          </a:p>
-        </p:txBody>
-      </p:sp>
-      <p:sp>
-        <p:nvSpPr>
-          <p:cNvPr id="14" name="矢印: 下 13">
-            <a:extLst>
-              <a:ext uri="{FF2B5EF4-FFF2-40B4-BE49-F238E27FC236}">
-                <a16:creationId xmlns:a16="http://schemas.microsoft.com/office/drawing/2014/main" id="{34CE8FD6-5703-457F-8DC5-ED2DE81E2FA0}"/>
-              </a:ext>
-            </a:extLst>
-          </p:cNvPr>
-          <p:cNvSpPr/>
-          <p:nvPr/>
-        </p:nvSpPr>
-        <p:spPr>
-          <a:xfrm>
-            <a:off x="9544611" y="2868808"/>
-            <a:ext cx="484632" cy="978408"/>
-          </a:xfrm>
-          <a:prstGeom prst="downArrow">
-            <a:avLst/>
-          </a:prstGeom>
-          <a:solidFill>
-            <a:srgbClr val="FF0000"/>
-          </a:solidFill>
-        </p:spPr>
-        <p:style>
-          <a:lnRef idx="2">
-            <a:schemeClr val="accent1">
-              <a:shade val="50000"/>
-            </a:schemeClr>
-          </a:lnRef>
-          <a:fillRef idx="1">
-            <a:schemeClr val="accent1"/>
-          </a:fillRef>
-          <a:effectRef idx="0">
-            <a:schemeClr val="accent1"/>
-          </a:effectRef>
-          <a:fontRef idx="minor">
-            <a:schemeClr val="lt1"/>
-          </a:fontRef>
-        </p:style>
-        <p:txBody>
-          <a:bodyPr rtlCol="0" anchor="ctr"/>
-          <a:lstStyle/>
-          <a:p>
-            <a:pPr algn="ctr"/>
-            <a:endParaRPr kumimoji="1" lang="ja-JP" altLang="en-US" dirty="0"/>
+              <a:t>終わり</a:t>
+            </a:r>
           </a:p>
         </p:txBody>
       </p:sp>
     </p:spTree>
     <p:extLst>
       <p:ext uri="{BB962C8B-B14F-4D97-AF65-F5344CB8AC3E}">
-        <p14:creationId xmlns:p14="http://schemas.microsoft.com/office/powerpoint/2010/main" val="4047880640"/>
+        <p14:creationId xmlns:p14="http://schemas.microsoft.com/office/powerpoint/2010/main" val="4151086904"/>
       </p:ext>
     </p:extLst>
   </p:cSld>
@@ -5118,7 +4742,7 @@
           <p:cNvPr id="2" name="正方形/長方形 1">
             <a:extLst>
               <a:ext uri="{FF2B5EF4-FFF2-40B4-BE49-F238E27FC236}">
-                <a16:creationId xmlns:a16="http://schemas.microsoft.com/office/drawing/2014/main" id="{25AC1EE1-F107-4938-BD9B-9266B364809B}"/>
+                <a16:creationId xmlns:a16="http://schemas.microsoft.com/office/drawing/2014/main" id="{1A56CE55-53D8-4113-BD6F-C0AB21771132}"/>
               </a:ext>
             </a:extLst>
           </p:cNvPr>
@@ -5127,8 +4751,8 @@
         </p:nvSpPr>
         <p:spPr>
           <a:xfrm>
-            <a:off x="184014" y="453350"/>
-            <a:ext cx="2860743" cy="914400"/>
+            <a:off x="184013" y="560120"/>
+            <a:ext cx="8308233" cy="1138136"/>
           </a:xfrm>
           <a:prstGeom prst="rect">
             <a:avLst/>
@@ -5152,40 +4776,99 @@
           </a:fontRef>
         </p:style>
         <p:txBody>
-          <a:bodyPr rtlCol="0" anchor="ctr"/>
-          <a:lstStyle/>
-          <a:p>
-            <a:pPr algn="ctr"/>
-            <a:r>
-              <a:rPr lang="ja-JP" altLang="en-US" sz="4800" dirty="0">
-                <a:latin typeface="メイリオ" panose="020B0604030504040204" pitchFamily="50" charset="-128"/>
-                <a:ea typeface="メイリオ" panose="020B0604030504040204" pitchFamily="50" charset="-128"/>
-              </a:rPr>
-              <a:t>制作</a:t>
-            </a:r>
-            <a:endParaRPr lang="en-US" altLang="ja-JP" sz="4800" dirty="0">
-              <a:latin typeface="メイリオ" panose="020B0604030504040204" pitchFamily="50" charset="-128"/>
-              <a:ea typeface="メイリオ" panose="020B0604030504040204" pitchFamily="50" charset="-128"/>
-            </a:endParaRPr>
-          </a:p>
-          <a:p>
-            <a:pPr algn="ctr"/>
+          <a:bodyPr rtlCol="0" anchor="t"/>
+          <a:lstStyle/>
+          <a:p>
+            <a:pPr algn="r">
+              <a:lnSpc>
+                <a:spcPct val="150000"/>
+              </a:lnSpc>
+            </a:pPr>
             <a:r>
               <a:rPr kumimoji="1" lang="ja-JP" altLang="en-US" sz="4800" dirty="0">
                 <a:latin typeface="メイリオ" panose="020B0604030504040204" pitchFamily="50" charset="-128"/>
                 <a:ea typeface="メイリオ" panose="020B0604030504040204" pitchFamily="50" charset="-128"/>
               </a:rPr>
-              <a:t>技術</a:t>
-            </a:r>
-          </a:p>
-        </p:txBody>
-      </p:sp>
-      <p:sp>
-        <p:nvSpPr>
-          <p:cNvPr id="3" name="正方形/長方形 2">
-            <a:extLst>
-              <a:ext uri="{FF2B5EF4-FFF2-40B4-BE49-F238E27FC236}">
-                <a16:creationId xmlns:a16="http://schemas.microsoft.com/office/drawing/2014/main" id="{62A48834-5186-46A9-BA93-D439F279654F}"/>
+              <a:t>このゲームで一番面白い瞬間</a:t>
+            </a:r>
+            <a:endParaRPr kumimoji="1" lang="en-US" altLang="ja-JP" sz="4800" dirty="0">
+              <a:latin typeface="メイリオ" panose="020B0604030504040204" pitchFamily="50" charset="-128"/>
+              <a:ea typeface="メイリオ" panose="020B0604030504040204" pitchFamily="50" charset="-128"/>
+            </a:endParaRPr>
+          </a:p>
+          <a:p>
+            <a:pPr algn="r">
+              <a:lnSpc>
+                <a:spcPct val="150000"/>
+              </a:lnSpc>
+            </a:pPr>
+            <a:endParaRPr kumimoji="1" lang="en-US" altLang="ja-JP" sz="4800" dirty="0">
+              <a:latin typeface="メイリオ" panose="020B0604030504040204" pitchFamily="50" charset="-128"/>
+              <a:ea typeface="メイリオ" panose="020B0604030504040204" pitchFamily="50" charset="-128"/>
+            </a:endParaRPr>
+          </a:p>
+          <a:p>
+            <a:pPr algn="r">
+              <a:lnSpc>
+                <a:spcPct val="150000"/>
+              </a:lnSpc>
+            </a:pPr>
+            <a:endParaRPr kumimoji="1" lang="ja-JP" altLang="en-US" sz="4800" dirty="0">
+              <a:latin typeface="メイリオ" panose="020B0604030504040204" pitchFamily="50" charset="-128"/>
+              <a:ea typeface="メイリオ" panose="020B0604030504040204" pitchFamily="50" charset="-128"/>
+            </a:endParaRPr>
+          </a:p>
+        </p:txBody>
+      </p:sp>
+      <p:sp>
+        <p:nvSpPr>
+          <p:cNvPr id="3" name="テキスト ボックス 2">
+            <a:extLst>
+              <a:ext uri="{FF2B5EF4-FFF2-40B4-BE49-F238E27FC236}">
+                <a16:creationId xmlns:a16="http://schemas.microsoft.com/office/drawing/2014/main" id="{BAC67377-142B-4D87-834E-4FEDAD2A2B5F}"/>
+              </a:ext>
+            </a:extLst>
+          </p:cNvPr>
+          <p:cNvSpPr txBox="1"/>
+          <p:nvPr/>
+        </p:nvSpPr>
+        <p:spPr>
+          <a:xfrm>
+            <a:off x="1847379" y="5248071"/>
+            <a:ext cx="6094378" cy="369332"/>
+          </a:xfrm>
+          <a:prstGeom prst="rect">
+            <a:avLst/>
+          </a:prstGeom>
+          <a:noFill/>
+        </p:spPr>
+        <p:txBody>
+          <a:bodyPr wrap="square">
+            <a:spAutoFit/>
+          </a:bodyPr>
+          <a:lstStyle/>
+          <a:p>
+            <a:pPr algn="ctr"/>
+            <a:r>
+              <a:rPr lang="ja-JP" altLang="en-US" dirty="0">
+                <a:latin typeface="メイリオ" panose="020B0604030504040204" pitchFamily="50" charset="-128"/>
+                <a:ea typeface="メイリオ" panose="020B0604030504040204" pitchFamily="50" charset="-128"/>
+              </a:rPr>
+              <a:t>なにをさせたいのか　どんな気持ちにさせたい</a:t>
+            </a:r>
+            <a:endParaRPr kumimoji="1" lang="en-US" altLang="ja-JP" sz="1800" dirty="0">
+              <a:latin typeface="メイリオ" panose="020B0604030504040204" pitchFamily="50" charset="-128"/>
+              <a:ea typeface="メイリオ" panose="020B0604030504040204" pitchFamily="50" charset="-128"/>
+            </a:endParaRPr>
+          </a:p>
+        </p:txBody>
+      </p:sp>
+      <p:sp>
+        <p:nvSpPr>
+          <p:cNvPr id="4" name="正方形/長方形 3">
+            <a:extLst>
+              <a:ext uri="{FF2B5EF4-FFF2-40B4-BE49-F238E27FC236}">
+                <a16:creationId xmlns:a16="http://schemas.microsoft.com/office/drawing/2014/main" id="{FDE00C1E-5F09-44B3-9D60-249CD5642B5B}"/>
               </a:ext>
             </a:extLst>
           </p:cNvPr>
@@ -5194,8 +4877,8 @@
         </p:nvSpPr>
         <p:spPr>
           <a:xfrm>
-            <a:off x="1266825" y="2310725"/>
-            <a:ext cx="1924050" cy="1118275"/>
+            <a:off x="515158" y="3037741"/>
+            <a:ext cx="2947481" cy="914400"/>
           </a:xfrm>
           <a:prstGeom prst="rect">
             <a:avLst/>
@@ -5225,6 +4908,602 @@
                 <a:latin typeface="メイリオ" panose="020B0604030504040204" pitchFamily="50" charset="-128"/>
                 <a:ea typeface="メイリオ" panose="020B0604030504040204" pitchFamily="50" charset="-128"/>
               </a:rPr>
+              <a:t>自分の書いた文字に</a:t>
+            </a:r>
+            <a:endParaRPr kumimoji="1" lang="en-US" altLang="ja-JP" dirty="0">
+              <a:latin typeface="メイリオ" panose="020B0604030504040204" pitchFamily="50" charset="-128"/>
+              <a:ea typeface="メイリオ" panose="020B0604030504040204" pitchFamily="50" charset="-128"/>
+            </a:endParaRPr>
+          </a:p>
+          <a:p>
+            <a:pPr algn="ctr"/>
+            <a:r>
+              <a:rPr kumimoji="1" lang="ja-JP" altLang="en-US" dirty="0">
+                <a:latin typeface="メイリオ" panose="020B0604030504040204" pitchFamily="50" charset="-128"/>
+                <a:ea typeface="メイリオ" panose="020B0604030504040204" pitchFamily="50" charset="-128"/>
+              </a:rPr>
+              <a:t>満足できるとき</a:t>
+            </a:r>
+          </a:p>
+        </p:txBody>
+      </p:sp>
+      <p:sp>
+        <p:nvSpPr>
+          <p:cNvPr id="7" name="正方形/長方形 6">
+            <a:extLst>
+              <a:ext uri="{FF2B5EF4-FFF2-40B4-BE49-F238E27FC236}">
+                <a16:creationId xmlns:a16="http://schemas.microsoft.com/office/drawing/2014/main" id="{5507A22D-974F-4D2F-9E4C-0869B25B6561}"/>
+              </a:ext>
+            </a:extLst>
+          </p:cNvPr>
+          <p:cNvSpPr/>
+          <p:nvPr/>
+        </p:nvSpPr>
+        <p:spPr>
+          <a:xfrm>
+            <a:off x="8444013" y="4149085"/>
+            <a:ext cx="2947481" cy="914400"/>
+          </a:xfrm>
+          <a:prstGeom prst="rect">
+            <a:avLst/>
+          </a:prstGeom>
+        </p:spPr>
+        <p:style>
+          <a:lnRef idx="2">
+            <a:schemeClr val="dk1"/>
+          </a:lnRef>
+          <a:fillRef idx="1">
+            <a:schemeClr val="lt1"/>
+          </a:fillRef>
+          <a:effectRef idx="0">
+            <a:schemeClr val="dk1"/>
+          </a:effectRef>
+          <a:fontRef idx="minor">
+            <a:schemeClr val="dk1"/>
+          </a:fontRef>
+        </p:style>
+        <p:txBody>
+          <a:bodyPr rtlCol="0" anchor="ctr"/>
+          <a:lstStyle/>
+          <a:p>
+            <a:pPr algn="ctr"/>
+            <a:r>
+              <a:rPr lang="ja-JP" altLang="en-US" dirty="0">
+                <a:latin typeface="メイリオ" panose="020B0604030504040204" pitchFamily="50" charset="-128"/>
+                <a:ea typeface="メイリオ" panose="020B0604030504040204" pitchFamily="50" charset="-128"/>
+              </a:rPr>
+              <a:t>達成感・満足感・誇らしさ</a:t>
+            </a:r>
+            <a:endParaRPr kumimoji="1" lang="en-US" altLang="ja-JP" dirty="0">
+              <a:latin typeface="メイリオ" panose="020B0604030504040204" pitchFamily="50" charset="-128"/>
+              <a:ea typeface="メイリオ" panose="020B0604030504040204" pitchFamily="50" charset="-128"/>
+            </a:endParaRPr>
+          </a:p>
+        </p:txBody>
+      </p:sp>
+      <p:sp>
+        <p:nvSpPr>
+          <p:cNvPr id="8" name="矢印: 下 7">
+            <a:extLst>
+              <a:ext uri="{FF2B5EF4-FFF2-40B4-BE49-F238E27FC236}">
+                <a16:creationId xmlns:a16="http://schemas.microsoft.com/office/drawing/2014/main" id="{B50A8EDE-AF58-4584-A9E5-71C8FCCEDEDD}"/>
+              </a:ext>
+            </a:extLst>
+          </p:cNvPr>
+          <p:cNvSpPr/>
+          <p:nvPr/>
+        </p:nvSpPr>
+        <p:spPr>
+          <a:xfrm>
+            <a:off x="1605063" y="1738000"/>
+            <a:ext cx="484632" cy="978408"/>
+          </a:xfrm>
+          <a:prstGeom prst="downArrow">
+            <a:avLst/>
+          </a:prstGeom>
+          <a:solidFill>
+            <a:srgbClr val="FF0000"/>
+          </a:solidFill>
+        </p:spPr>
+        <p:style>
+          <a:lnRef idx="2">
+            <a:schemeClr val="accent1">
+              <a:shade val="50000"/>
+            </a:schemeClr>
+          </a:lnRef>
+          <a:fillRef idx="1">
+            <a:schemeClr val="accent1"/>
+          </a:fillRef>
+          <a:effectRef idx="0">
+            <a:schemeClr val="accent1"/>
+          </a:effectRef>
+          <a:fontRef idx="minor">
+            <a:schemeClr val="lt1"/>
+          </a:fontRef>
+        </p:style>
+        <p:txBody>
+          <a:bodyPr rtlCol="0" anchor="ctr"/>
+          <a:lstStyle/>
+          <a:p>
+            <a:pPr algn="ctr"/>
+            <a:endParaRPr kumimoji="1" lang="ja-JP" altLang="en-US" dirty="0"/>
+          </a:p>
+        </p:txBody>
+      </p:sp>
+      <p:sp>
+        <p:nvSpPr>
+          <p:cNvPr id="9" name="正方形/長方形 8">
+            <a:extLst>
+              <a:ext uri="{FF2B5EF4-FFF2-40B4-BE49-F238E27FC236}">
+                <a16:creationId xmlns:a16="http://schemas.microsoft.com/office/drawing/2014/main" id="{C7EA132F-B1B2-4B4C-897B-F2F5D7F95870}"/>
+              </a:ext>
+            </a:extLst>
+          </p:cNvPr>
+          <p:cNvSpPr/>
+          <p:nvPr/>
+        </p:nvSpPr>
+        <p:spPr>
+          <a:xfrm>
+            <a:off x="7966951" y="1425263"/>
+            <a:ext cx="3901603" cy="1568544"/>
+          </a:xfrm>
+          <a:prstGeom prst="rect">
+            <a:avLst/>
+          </a:prstGeom>
+          <a:ln>
+            <a:noFill/>
+          </a:ln>
+        </p:spPr>
+        <p:style>
+          <a:lnRef idx="2">
+            <a:schemeClr val="accent6"/>
+          </a:lnRef>
+          <a:fillRef idx="1">
+            <a:schemeClr val="lt1"/>
+          </a:fillRef>
+          <a:effectRef idx="0">
+            <a:schemeClr val="accent6"/>
+          </a:effectRef>
+          <a:fontRef idx="minor">
+            <a:schemeClr val="dk1"/>
+          </a:fontRef>
+        </p:style>
+        <p:txBody>
+          <a:bodyPr rtlCol="0" anchor="ctr"/>
+          <a:lstStyle/>
+          <a:p>
+            <a:pPr algn="ctr"/>
+            <a:endParaRPr kumimoji="1" lang="en-US" altLang="ja-JP" sz="4800" dirty="0">
+              <a:latin typeface="メイリオ" panose="020B0604030504040204" pitchFamily="50" charset="-128"/>
+              <a:ea typeface="メイリオ" panose="020B0604030504040204" pitchFamily="50" charset="-128"/>
+            </a:endParaRPr>
+          </a:p>
+          <a:p>
+            <a:pPr algn="ctr"/>
+            <a:r>
+              <a:rPr kumimoji="1" lang="ja-JP" altLang="en-US" sz="4800" dirty="0">
+                <a:latin typeface="メイリオ" panose="020B0604030504040204" pitchFamily="50" charset="-128"/>
+                <a:ea typeface="メイリオ" panose="020B0604030504040204" pitchFamily="50" charset="-128"/>
+              </a:rPr>
+              <a:t>プレイヤーが</a:t>
+            </a:r>
+            <a:endParaRPr kumimoji="1" lang="en-US" altLang="ja-JP" sz="4800" dirty="0">
+              <a:latin typeface="メイリオ" panose="020B0604030504040204" pitchFamily="50" charset="-128"/>
+              <a:ea typeface="メイリオ" panose="020B0604030504040204" pitchFamily="50" charset="-128"/>
+            </a:endParaRPr>
+          </a:p>
+          <a:p>
+            <a:pPr algn="ctr"/>
+            <a:r>
+              <a:rPr kumimoji="1" lang="ja-JP" altLang="en-US" sz="4800" dirty="0">
+                <a:latin typeface="メイリオ" panose="020B0604030504040204" pitchFamily="50" charset="-128"/>
+                <a:ea typeface="メイリオ" panose="020B0604030504040204" pitchFamily="50" charset="-128"/>
+              </a:rPr>
+              <a:t>どう感じるか</a:t>
+            </a:r>
+            <a:endParaRPr kumimoji="1" lang="en-US" altLang="ja-JP" sz="4800" dirty="0">
+              <a:latin typeface="メイリオ" panose="020B0604030504040204" pitchFamily="50" charset="-128"/>
+              <a:ea typeface="メイリオ" panose="020B0604030504040204" pitchFamily="50" charset="-128"/>
+            </a:endParaRPr>
+          </a:p>
+          <a:p>
+            <a:pPr algn="ctr"/>
+            <a:endParaRPr kumimoji="1" lang="ja-JP" altLang="en-US" sz="4800" dirty="0">
+              <a:latin typeface="メイリオ" panose="020B0604030504040204" pitchFamily="50" charset="-128"/>
+              <a:ea typeface="メイリオ" panose="020B0604030504040204" pitchFamily="50" charset="-128"/>
+            </a:endParaRPr>
+          </a:p>
+        </p:txBody>
+      </p:sp>
+      <p:sp>
+        <p:nvSpPr>
+          <p:cNvPr id="5" name="矢印: 下 4">
+            <a:extLst>
+              <a:ext uri="{FF2B5EF4-FFF2-40B4-BE49-F238E27FC236}">
+                <a16:creationId xmlns:a16="http://schemas.microsoft.com/office/drawing/2014/main" id="{837F0AB4-6508-4619-9F4E-827A6B1D64EE}"/>
+              </a:ext>
+            </a:extLst>
+          </p:cNvPr>
+          <p:cNvSpPr/>
+          <p:nvPr/>
+        </p:nvSpPr>
+        <p:spPr>
+          <a:xfrm>
+            <a:off x="3220323" y="5657358"/>
+            <a:ext cx="484632" cy="464058"/>
+          </a:xfrm>
+          <a:prstGeom prst="downArrow">
+            <a:avLst/>
+          </a:prstGeom>
+          <a:solidFill>
+            <a:srgbClr val="FF0000"/>
+          </a:solidFill>
+        </p:spPr>
+        <p:style>
+          <a:lnRef idx="2">
+            <a:schemeClr val="accent1">
+              <a:shade val="50000"/>
+            </a:schemeClr>
+          </a:lnRef>
+          <a:fillRef idx="1">
+            <a:schemeClr val="accent1"/>
+          </a:fillRef>
+          <a:effectRef idx="0">
+            <a:schemeClr val="accent1"/>
+          </a:effectRef>
+          <a:fontRef idx="minor">
+            <a:schemeClr val="lt1"/>
+          </a:fontRef>
+        </p:style>
+        <p:txBody>
+          <a:bodyPr rtlCol="0" anchor="ctr"/>
+          <a:lstStyle/>
+          <a:p>
+            <a:pPr algn="ctr"/>
+            <a:endParaRPr kumimoji="1" lang="ja-JP" altLang="en-US"/>
+          </a:p>
+        </p:txBody>
+      </p:sp>
+      <p:sp>
+        <p:nvSpPr>
+          <p:cNvPr id="11" name="矢印: 下 10">
+            <a:extLst>
+              <a:ext uri="{FF2B5EF4-FFF2-40B4-BE49-F238E27FC236}">
+                <a16:creationId xmlns:a16="http://schemas.microsoft.com/office/drawing/2014/main" id="{905904F0-FEAE-48AF-B206-826D19493D03}"/>
+              </a:ext>
+            </a:extLst>
+          </p:cNvPr>
+          <p:cNvSpPr/>
+          <p:nvPr/>
+        </p:nvSpPr>
+        <p:spPr>
+          <a:xfrm>
+            <a:off x="5487273" y="5657358"/>
+            <a:ext cx="484632" cy="464058"/>
+          </a:xfrm>
+          <a:prstGeom prst="downArrow">
+            <a:avLst/>
+          </a:prstGeom>
+          <a:solidFill>
+            <a:srgbClr val="FF0000"/>
+          </a:solidFill>
+        </p:spPr>
+        <p:style>
+          <a:lnRef idx="2">
+            <a:schemeClr val="accent1">
+              <a:shade val="50000"/>
+            </a:schemeClr>
+          </a:lnRef>
+          <a:fillRef idx="1">
+            <a:schemeClr val="accent1"/>
+          </a:fillRef>
+          <a:effectRef idx="0">
+            <a:schemeClr val="accent1"/>
+          </a:effectRef>
+          <a:fontRef idx="minor">
+            <a:schemeClr val="lt1"/>
+          </a:fontRef>
+        </p:style>
+        <p:txBody>
+          <a:bodyPr rtlCol="0" anchor="ctr"/>
+          <a:lstStyle/>
+          <a:p>
+            <a:pPr algn="ctr"/>
+            <a:endParaRPr kumimoji="1" lang="ja-JP" altLang="en-US"/>
+          </a:p>
+        </p:txBody>
+      </p:sp>
+      <p:sp>
+        <p:nvSpPr>
+          <p:cNvPr id="12" name="正方形/長方形 11">
+            <a:extLst>
+              <a:ext uri="{FF2B5EF4-FFF2-40B4-BE49-F238E27FC236}">
+                <a16:creationId xmlns:a16="http://schemas.microsoft.com/office/drawing/2014/main" id="{1D1C65D6-BC17-41B6-8B2F-678CFB6D3777}"/>
+              </a:ext>
+            </a:extLst>
+          </p:cNvPr>
+          <p:cNvSpPr/>
+          <p:nvPr/>
+        </p:nvSpPr>
+        <p:spPr>
+          <a:xfrm>
+            <a:off x="5353049" y="6172200"/>
+            <a:ext cx="695325" cy="571500"/>
+          </a:xfrm>
+          <a:prstGeom prst="rect">
+            <a:avLst/>
+          </a:prstGeom>
+        </p:spPr>
+        <p:style>
+          <a:lnRef idx="2">
+            <a:schemeClr val="dk1"/>
+          </a:lnRef>
+          <a:fillRef idx="1">
+            <a:schemeClr val="lt1"/>
+          </a:fillRef>
+          <a:effectRef idx="0">
+            <a:schemeClr val="dk1"/>
+          </a:effectRef>
+          <a:fontRef idx="minor">
+            <a:schemeClr val="dk1"/>
+          </a:fontRef>
+        </p:style>
+        <p:txBody>
+          <a:bodyPr rtlCol="0" anchor="ctr"/>
+          <a:lstStyle/>
+          <a:p>
+            <a:pPr algn="ctr"/>
+            <a:r>
+              <a:rPr kumimoji="1" lang="ja-JP" altLang="en-US" dirty="0">
+                <a:latin typeface="メイリオ" panose="020B0604030504040204" pitchFamily="50" charset="-128"/>
+                <a:ea typeface="メイリオ" panose="020B0604030504040204" pitchFamily="50" charset="-128"/>
+              </a:rPr>
+              <a:t>満足</a:t>
+            </a:r>
+          </a:p>
+        </p:txBody>
+      </p:sp>
+      <p:sp>
+        <p:nvSpPr>
+          <p:cNvPr id="13" name="正方形/長方形 12">
+            <a:extLst>
+              <a:ext uri="{FF2B5EF4-FFF2-40B4-BE49-F238E27FC236}">
+                <a16:creationId xmlns:a16="http://schemas.microsoft.com/office/drawing/2014/main" id="{4AF0D3BD-546E-4F94-BF34-BE6901DB6F25}"/>
+              </a:ext>
+            </a:extLst>
+          </p:cNvPr>
+          <p:cNvSpPr/>
+          <p:nvPr/>
+        </p:nvSpPr>
+        <p:spPr>
+          <a:xfrm>
+            <a:off x="3133725" y="6121416"/>
+            <a:ext cx="695325" cy="571500"/>
+          </a:xfrm>
+          <a:prstGeom prst="rect">
+            <a:avLst/>
+          </a:prstGeom>
+        </p:spPr>
+        <p:style>
+          <a:lnRef idx="2">
+            <a:schemeClr val="dk1"/>
+          </a:lnRef>
+          <a:fillRef idx="1">
+            <a:schemeClr val="lt1"/>
+          </a:fillRef>
+          <a:effectRef idx="0">
+            <a:schemeClr val="dk1"/>
+          </a:effectRef>
+          <a:fontRef idx="minor">
+            <a:schemeClr val="dk1"/>
+          </a:fontRef>
+        </p:style>
+        <p:txBody>
+          <a:bodyPr rtlCol="0" anchor="ctr"/>
+          <a:lstStyle/>
+          <a:p>
+            <a:pPr algn="ctr"/>
+            <a:r>
+              <a:rPr kumimoji="1" lang="ja-JP" altLang="en-US" dirty="0">
+                <a:latin typeface="メイリオ" panose="020B0604030504040204" pitchFamily="50" charset="-128"/>
+                <a:ea typeface="メイリオ" panose="020B0604030504040204" pitchFamily="50" charset="-128"/>
+              </a:rPr>
+              <a:t>書道</a:t>
+            </a:r>
+          </a:p>
+        </p:txBody>
+      </p:sp>
+      <p:sp>
+        <p:nvSpPr>
+          <p:cNvPr id="14" name="矢印: 下 13">
+            <a:extLst>
+              <a:ext uri="{FF2B5EF4-FFF2-40B4-BE49-F238E27FC236}">
+                <a16:creationId xmlns:a16="http://schemas.microsoft.com/office/drawing/2014/main" id="{34CE8FD6-5703-457F-8DC5-ED2DE81E2FA0}"/>
+              </a:ext>
+            </a:extLst>
+          </p:cNvPr>
+          <p:cNvSpPr/>
+          <p:nvPr/>
+        </p:nvSpPr>
+        <p:spPr>
+          <a:xfrm>
+            <a:off x="9544611" y="2868808"/>
+            <a:ext cx="484632" cy="978408"/>
+          </a:xfrm>
+          <a:prstGeom prst="downArrow">
+            <a:avLst/>
+          </a:prstGeom>
+          <a:solidFill>
+            <a:srgbClr val="FF0000"/>
+          </a:solidFill>
+        </p:spPr>
+        <p:style>
+          <a:lnRef idx="2">
+            <a:schemeClr val="accent1">
+              <a:shade val="50000"/>
+            </a:schemeClr>
+          </a:lnRef>
+          <a:fillRef idx="1">
+            <a:schemeClr val="accent1"/>
+          </a:fillRef>
+          <a:effectRef idx="0">
+            <a:schemeClr val="accent1"/>
+          </a:effectRef>
+          <a:fontRef idx="minor">
+            <a:schemeClr val="lt1"/>
+          </a:fontRef>
+        </p:style>
+        <p:txBody>
+          <a:bodyPr rtlCol="0" anchor="ctr"/>
+          <a:lstStyle/>
+          <a:p>
+            <a:pPr algn="ctr"/>
+            <a:endParaRPr kumimoji="1" lang="ja-JP" altLang="en-US" dirty="0"/>
+          </a:p>
+        </p:txBody>
+      </p:sp>
+    </p:spTree>
+    <p:extLst>
+      <p:ext uri="{BB962C8B-B14F-4D97-AF65-F5344CB8AC3E}">
+        <p14:creationId xmlns:p14="http://schemas.microsoft.com/office/powerpoint/2010/main" val="4047880640"/>
+      </p:ext>
+    </p:extLst>
+  </p:cSld>
+  <p:clrMapOvr>
+    <a:masterClrMapping/>
+  </p:clrMapOvr>
+</p:sld>
+</file>
+
+<file path=ppt/slides/slide13.xml><?xml version="1.0" encoding="utf-8"?>
+<p:sld xmlns:a="http://schemas.openxmlformats.org/drawingml/2006/main" xmlns:r="http://schemas.openxmlformats.org/officeDocument/2006/relationships" xmlns:p="http://schemas.openxmlformats.org/presentationml/2006/main">
+  <p:cSld>
+    <p:spTree>
+      <p:nvGrpSpPr>
+        <p:cNvPr id="1" name=""/>
+        <p:cNvGrpSpPr/>
+        <p:nvPr/>
+      </p:nvGrpSpPr>
+      <p:grpSpPr>
+        <a:xfrm>
+          <a:off x="0" y="0"/>
+          <a:ext cx="0" cy="0"/>
+          <a:chOff x="0" y="0"/>
+          <a:chExt cx="0" cy="0"/>
+        </a:xfrm>
+      </p:grpSpPr>
+      <p:sp>
+        <p:nvSpPr>
+          <p:cNvPr id="2" name="正方形/長方形 1">
+            <a:extLst>
+              <a:ext uri="{FF2B5EF4-FFF2-40B4-BE49-F238E27FC236}">
+                <a16:creationId xmlns:a16="http://schemas.microsoft.com/office/drawing/2014/main" id="{25AC1EE1-F107-4938-BD9B-9266B364809B}"/>
+              </a:ext>
+            </a:extLst>
+          </p:cNvPr>
+          <p:cNvSpPr/>
+          <p:nvPr/>
+        </p:nvSpPr>
+        <p:spPr>
+          <a:xfrm>
+            <a:off x="184014" y="453350"/>
+            <a:ext cx="2860743" cy="914400"/>
+          </a:xfrm>
+          <a:prstGeom prst="rect">
+            <a:avLst/>
+          </a:prstGeom>
+          <a:ln>
+            <a:noFill/>
+          </a:ln>
+        </p:spPr>
+        <p:style>
+          <a:lnRef idx="2">
+            <a:schemeClr val="accent6"/>
+          </a:lnRef>
+          <a:fillRef idx="1">
+            <a:schemeClr val="lt1"/>
+          </a:fillRef>
+          <a:effectRef idx="0">
+            <a:schemeClr val="accent6"/>
+          </a:effectRef>
+          <a:fontRef idx="minor">
+            <a:schemeClr val="dk1"/>
+          </a:fontRef>
+        </p:style>
+        <p:txBody>
+          <a:bodyPr rtlCol="0" anchor="ctr"/>
+          <a:lstStyle/>
+          <a:p>
+            <a:pPr algn="ctr"/>
+            <a:r>
+              <a:rPr lang="ja-JP" altLang="en-US" sz="4800" dirty="0">
+                <a:latin typeface="メイリオ" panose="020B0604030504040204" pitchFamily="50" charset="-128"/>
+                <a:ea typeface="メイリオ" panose="020B0604030504040204" pitchFamily="50" charset="-128"/>
+              </a:rPr>
+              <a:t>制作</a:t>
+            </a:r>
+            <a:endParaRPr lang="en-US" altLang="ja-JP" sz="4800" dirty="0">
+              <a:latin typeface="メイリオ" panose="020B0604030504040204" pitchFamily="50" charset="-128"/>
+              <a:ea typeface="メイリオ" panose="020B0604030504040204" pitchFamily="50" charset="-128"/>
+            </a:endParaRPr>
+          </a:p>
+          <a:p>
+            <a:pPr algn="ctr"/>
+            <a:r>
+              <a:rPr kumimoji="1" lang="ja-JP" altLang="en-US" sz="4800" dirty="0">
+                <a:latin typeface="メイリオ" panose="020B0604030504040204" pitchFamily="50" charset="-128"/>
+                <a:ea typeface="メイリオ" panose="020B0604030504040204" pitchFamily="50" charset="-128"/>
+              </a:rPr>
+              <a:t>技術</a:t>
+            </a:r>
+          </a:p>
+        </p:txBody>
+      </p:sp>
+      <p:sp>
+        <p:nvSpPr>
+          <p:cNvPr id="3" name="正方形/長方形 2">
+            <a:extLst>
+              <a:ext uri="{FF2B5EF4-FFF2-40B4-BE49-F238E27FC236}">
+                <a16:creationId xmlns:a16="http://schemas.microsoft.com/office/drawing/2014/main" id="{62A48834-5186-46A9-BA93-D439F279654F}"/>
+              </a:ext>
+            </a:extLst>
+          </p:cNvPr>
+          <p:cNvSpPr/>
+          <p:nvPr/>
+        </p:nvSpPr>
+        <p:spPr>
+          <a:xfrm>
+            <a:off x="1266825" y="2310725"/>
+            <a:ext cx="1924050" cy="1118275"/>
+          </a:xfrm>
+          <a:prstGeom prst="rect">
+            <a:avLst/>
+          </a:prstGeom>
+        </p:spPr>
+        <p:style>
+          <a:lnRef idx="2">
+            <a:schemeClr val="dk1"/>
+          </a:lnRef>
+          <a:fillRef idx="1">
+            <a:schemeClr val="lt1"/>
+          </a:fillRef>
+          <a:effectRef idx="0">
+            <a:schemeClr val="dk1"/>
+          </a:effectRef>
+          <a:fontRef idx="minor">
+            <a:schemeClr val="dk1"/>
+          </a:fontRef>
+        </p:style>
+        <p:txBody>
+          <a:bodyPr rtlCol="0" anchor="ctr"/>
+          <a:lstStyle/>
+          <a:p>
+            <a:pPr algn="ctr"/>
+            <a:r>
+              <a:rPr kumimoji="1" lang="ja-JP" altLang="en-US" dirty="0">
+                <a:latin typeface="メイリオ" panose="020B0604030504040204" pitchFamily="50" charset="-128"/>
+                <a:ea typeface="メイリオ" panose="020B0604030504040204" pitchFamily="50" charset="-128"/>
+              </a:rPr>
               <a:t>ユニティー</a:t>
             </a:r>
           </a:p>
@@ -5243,7 +5522,7 @@
 </p:sld>
 </file>
 
-<file path=ppt/slides/slide13.xml><?xml version="1.0" encoding="utf-8"?>
+<file path=ppt/slides/slide14.xml><?xml version="1.0" encoding="utf-8"?>
 <p:sld xmlns:a="http://schemas.openxmlformats.org/drawingml/2006/main" xmlns:r="http://schemas.openxmlformats.org/officeDocument/2006/relationships" xmlns:p="http://schemas.openxmlformats.org/presentationml/2006/main">
   <p:cSld>
     <p:spTree>
@@ -5441,6 +5720,109 @@
       </p:grpSpPr>
       <p:sp>
         <p:nvSpPr>
+          <p:cNvPr id="2" name="正方形/長方形 1">
+            <a:extLst>
+              <a:ext uri="{FF2B5EF4-FFF2-40B4-BE49-F238E27FC236}">
+                <a16:creationId xmlns:a16="http://schemas.microsoft.com/office/drawing/2014/main" id="{833A4E06-EE75-40A7-A1FD-D57D73A87CA8}"/>
+              </a:ext>
+            </a:extLst>
+          </p:cNvPr>
+          <p:cNvSpPr/>
+          <p:nvPr/>
+        </p:nvSpPr>
+        <p:spPr>
+          <a:xfrm>
+            <a:off x="957072" y="2121408"/>
+            <a:ext cx="10421112" cy="1307592"/>
+          </a:xfrm>
+          <a:prstGeom prst="rect">
+            <a:avLst/>
+          </a:prstGeom>
+          <a:ln>
+            <a:solidFill>
+              <a:schemeClr val="tx1"/>
+            </a:solidFill>
+          </a:ln>
+        </p:spPr>
+        <p:style>
+          <a:lnRef idx="2">
+            <a:schemeClr val="accent1">
+              <a:shade val="50000"/>
+            </a:schemeClr>
+          </a:lnRef>
+          <a:fillRef idx="1">
+            <a:schemeClr val="accent1"/>
+          </a:fillRef>
+          <a:effectRef idx="0">
+            <a:schemeClr val="accent1"/>
+          </a:effectRef>
+          <a:fontRef idx="minor">
+            <a:schemeClr val="lt1"/>
+          </a:fontRef>
+        </p:style>
+        <p:txBody>
+          <a:bodyPr rtlCol="0" anchor="ctr"/>
+          <a:lstStyle/>
+          <a:p>
+            <a:r>
+              <a:rPr lang="ja-JP" altLang="en-US" sz="2400" b="1" dirty="0">
+                <a:latin typeface="メイリオ" panose="020B0604030504040204" pitchFamily="50" charset="-128"/>
+                <a:ea typeface="メイリオ" panose="020B0604030504040204" pitchFamily="50" charset="-128"/>
+              </a:rPr>
+              <a:t>ターゲット</a:t>
+            </a:r>
+          </a:p>
+          <a:p>
+            <a:r>
+              <a:rPr lang="ja-JP" altLang="en-US" sz="2400" b="1" dirty="0">
+                <a:latin typeface="メイリオ" panose="020B0604030504040204" pitchFamily="50" charset="-128"/>
+                <a:ea typeface="メイリオ" panose="020B0604030504040204" pitchFamily="50" charset="-128"/>
+              </a:rPr>
+              <a:t>「普通のお絵描きゲームとは違う、新しい操作感のゲームを遊びたい人」</a:t>
+            </a:r>
+            <a:endParaRPr lang="ja-JP" altLang="en-US" sz="2400" dirty="0">
+              <a:latin typeface="メイリオ" panose="020B0604030504040204" pitchFamily="50" charset="-128"/>
+              <a:ea typeface="メイリオ" panose="020B0604030504040204" pitchFamily="50" charset="-128"/>
+            </a:endParaRPr>
+          </a:p>
+          <a:p>
+            <a:pPr algn="ctr"/>
+            <a:endParaRPr kumimoji="1" lang="ja-JP" altLang="en-US" sz="2400" dirty="0"/>
+          </a:p>
+        </p:txBody>
+      </p:sp>
+    </p:spTree>
+    <p:extLst>
+      <p:ext uri="{BB962C8B-B14F-4D97-AF65-F5344CB8AC3E}">
+        <p14:creationId xmlns:p14="http://schemas.microsoft.com/office/powerpoint/2010/main" val="1368519107"/>
+      </p:ext>
+    </p:extLst>
+  </p:cSld>
+  <p:clrMapOvr>
+    <a:masterClrMapping/>
+  </p:clrMapOvr>
+</p:sld>
+</file>
+
+<file path=ppt/slides/slide3.xml><?xml version="1.0" encoding="utf-8"?>
+<p:sld xmlns:a="http://schemas.openxmlformats.org/drawingml/2006/main" xmlns:r="http://schemas.openxmlformats.org/officeDocument/2006/relationships" xmlns:p="http://schemas.openxmlformats.org/presentationml/2006/main">
+  <p:cSld>
+    <p:spTree>
+      <p:nvGrpSpPr>
+        <p:cNvPr id="1" name=""/>
+        <p:cNvGrpSpPr/>
+        <p:nvPr/>
+      </p:nvGrpSpPr>
+      <p:grpSpPr>
+        <a:xfrm>
+          <a:off x="0" y="0"/>
+          <a:ext cx="0" cy="0"/>
+          <a:chOff x="0" y="0"/>
+          <a:chExt cx="0" cy="0"/>
+        </a:xfrm>
+      </p:grpSpPr>
+      <p:sp>
+        <p:nvSpPr>
           <p:cNvPr id="8" name="正方形/長方形 7">
             <a:extLst>
               <a:ext uri="{FF2B5EF4-FFF2-40B4-BE49-F238E27FC236}">
@@ -5570,7 +5952,7 @@
 </p:sld>
 </file>
 
-<file path=ppt/slides/slide3.xml><?xml version="1.0" encoding="utf-8"?>
+<file path=ppt/slides/slide4.xml><?xml version="1.0" encoding="utf-8"?>
 <p:sld xmlns:a="http://schemas.openxmlformats.org/drawingml/2006/main" xmlns:r="http://schemas.openxmlformats.org/officeDocument/2006/relationships" xmlns:p="http://schemas.openxmlformats.org/presentationml/2006/main">
   <p:cSld>
     <p:spTree>
@@ -6126,255 +6508,6 @@
 </p:sld>
 </file>
 
-<file path=ppt/slides/slide4.xml><?xml version="1.0" encoding="utf-8"?>
-<p:sld xmlns:a="http://schemas.openxmlformats.org/drawingml/2006/main" xmlns:r="http://schemas.openxmlformats.org/officeDocument/2006/relationships" xmlns:p="http://schemas.openxmlformats.org/presentationml/2006/main">
-  <p:cSld>
-    <p:spTree>
-      <p:nvGrpSpPr>
-        <p:cNvPr id="1" name=""/>
-        <p:cNvGrpSpPr/>
-        <p:nvPr/>
-      </p:nvGrpSpPr>
-      <p:grpSpPr>
-        <a:xfrm>
-          <a:off x="0" y="0"/>
-          <a:ext cx="0" cy="0"/>
-          <a:chOff x="0" y="0"/>
-          <a:chExt cx="0" cy="0"/>
-        </a:xfrm>
-      </p:grpSpPr>
-      <p:sp>
-        <p:nvSpPr>
-          <p:cNvPr id="3" name="正方形/長方形 2">
-            <a:extLst>
-              <a:ext uri="{FF2B5EF4-FFF2-40B4-BE49-F238E27FC236}">
-                <a16:creationId xmlns:a16="http://schemas.microsoft.com/office/drawing/2014/main" id="{8EE8F76E-6904-409A-AC76-C9CCF9F1E885}"/>
-              </a:ext>
-            </a:extLst>
-          </p:cNvPr>
-          <p:cNvSpPr/>
-          <p:nvPr/>
-        </p:nvSpPr>
-        <p:spPr>
-          <a:xfrm>
-            <a:off x="184014" y="453350"/>
-            <a:ext cx="2860743" cy="914400"/>
-          </a:xfrm>
-          <a:prstGeom prst="rect">
-            <a:avLst/>
-          </a:prstGeom>
-          <a:ln>
-            <a:noFill/>
-          </a:ln>
-        </p:spPr>
-        <p:style>
-          <a:lnRef idx="2">
-            <a:schemeClr val="accent6"/>
-          </a:lnRef>
-          <a:fillRef idx="1">
-            <a:schemeClr val="lt1"/>
-          </a:fillRef>
-          <a:effectRef idx="0">
-            <a:schemeClr val="accent6"/>
-          </a:effectRef>
-          <a:fontRef idx="minor">
-            <a:schemeClr val="dk1"/>
-          </a:fontRef>
-        </p:style>
-        <p:txBody>
-          <a:bodyPr rtlCol="0" anchor="ctr"/>
-          <a:lstStyle/>
-          <a:p>
-            <a:pPr algn="ctr"/>
-            <a:r>
-              <a:rPr kumimoji="1" lang="ja-JP" altLang="en-US" sz="4800" dirty="0">
-                <a:latin typeface="メイリオ" panose="020B0604030504040204" pitchFamily="50" charset="-128"/>
-                <a:ea typeface="メイリオ" panose="020B0604030504040204" pitchFamily="50" charset="-128"/>
-              </a:rPr>
-              <a:t>操作方法</a:t>
-            </a:r>
-          </a:p>
-        </p:txBody>
-      </p:sp>
-      <p:sp>
-        <p:nvSpPr>
-          <p:cNvPr id="2" name="正方形/長方形 1">
-            <a:extLst>
-              <a:ext uri="{FF2B5EF4-FFF2-40B4-BE49-F238E27FC236}">
-                <a16:creationId xmlns:a16="http://schemas.microsoft.com/office/drawing/2014/main" id="{528E3EEC-ED19-44E5-A90C-4BE60A2D4ABD}"/>
-              </a:ext>
-            </a:extLst>
-          </p:cNvPr>
-          <p:cNvSpPr/>
-          <p:nvPr/>
-        </p:nvSpPr>
-        <p:spPr>
-          <a:xfrm>
-            <a:off x="184014" y="1550722"/>
-            <a:ext cx="1333499" cy="914400"/>
-          </a:xfrm>
-          <a:prstGeom prst="rect">
-            <a:avLst/>
-          </a:prstGeom>
-        </p:spPr>
-        <p:style>
-          <a:lnRef idx="2">
-            <a:schemeClr val="dk1"/>
-          </a:lnRef>
-          <a:fillRef idx="1">
-            <a:schemeClr val="lt1"/>
-          </a:fillRef>
-          <a:effectRef idx="0">
-            <a:schemeClr val="dk1"/>
-          </a:effectRef>
-          <a:fontRef idx="minor">
-            <a:schemeClr val="dk1"/>
-          </a:fontRef>
-        </p:style>
-        <p:txBody>
-          <a:bodyPr rtlCol="0" anchor="ctr"/>
-          <a:lstStyle/>
-          <a:p>
-            <a:pPr algn="ctr"/>
-            <a:r>
-              <a:rPr kumimoji="1" lang="ja-JP" altLang="en-US" dirty="0">
-                <a:latin typeface="メイリオ" panose="020B0604030504040204" pitchFamily="50" charset="-128"/>
-                <a:ea typeface="メイリオ" panose="020B0604030504040204" pitchFamily="50" charset="-128"/>
-              </a:rPr>
-              <a:t>マウス操作</a:t>
-            </a:r>
-          </a:p>
-        </p:txBody>
-      </p:sp>
-      <p:sp>
-        <p:nvSpPr>
-          <p:cNvPr id="4" name="正方形/長方形 3">
-            <a:extLst>
-              <a:ext uri="{FF2B5EF4-FFF2-40B4-BE49-F238E27FC236}">
-                <a16:creationId xmlns:a16="http://schemas.microsoft.com/office/drawing/2014/main" id="{B1F8B859-E7F9-45FF-8D65-1077BE9574CA}"/>
-              </a:ext>
-            </a:extLst>
-          </p:cNvPr>
-          <p:cNvSpPr/>
-          <p:nvPr/>
-        </p:nvSpPr>
-        <p:spPr>
-          <a:xfrm>
-            <a:off x="6096000" y="1464997"/>
-            <a:ext cx="2066925" cy="914400"/>
-          </a:xfrm>
-          <a:prstGeom prst="rect">
-            <a:avLst/>
-          </a:prstGeom>
-        </p:spPr>
-        <p:style>
-          <a:lnRef idx="2">
-            <a:schemeClr val="dk1"/>
-          </a:lnRef>
-          <a:fillRef idx="1">
-            <a:schemeClr val="lt1"/>
-          </a:fillRef>
-          <a:effectRef idx="0">
-            <a:schemeClr val="dk1"/>
-          </a:effectRef>
-          <a:fontRef idx="minor">
-            <a:schemeClr val="dk1"/>
-          </a:fontRef>
-        </p:style>
-        <p:txBody>
-          <a:bodyPr rtlCol="0" anchor="ctr"/>
-          <a:lstStyle/>
-          <a:p>
-            <a:pPr algn="ctr"/>
-            <a:r>
-              <a:rPr kumimoji="1" lang="ja-JP" altLang="en-US" dirty="0">
-                <a:latin typeface="メイリオ" panose="020B0604030504040204" pitchFamily="50" charset="-128"/>
-                <a:ea typeface="メイリオ" panose="020B0604030504040204" pitchFamily="50" charset="-128"/>
-              </a:rPr>
-              <a:t>右クリックで</a:t>
-            </a:r>
-            <a:r>
-              <a:rPr lang="ja-JP" altLang="en-US" dirty="0">
-                <a:latin typeface="メイリオ" panose="020B0604030504040204" pitchFamily="50" charset="-128"/>
-                <a:ea typeface="メイリオ" panose="020B0604030504040204" pitchFamily="50" charset="-128"/>
-              </a:rPr>
-              <a:t>加速</a:t>
-            </a:r>
-            <a:endParaRPr kumimoji="1" lang="ja-JP" altLang="en-US" dirty="0">
-              <a:latin typeface="メイリオ" panose="020B0604030504040204" pitchFamily="50" charset="-128"/>
-              <a:ea typeface="メイリオ" panose="020B0604030504040204" pitchFamily="50" charset="-128"/>
-            </a:endParaRPr>
-          </a:p>
-        </p:txBody>
-      </p:sp>
-      <p:pic>
-        <p:nvPicPr>
-          <p:cNvPr id="8" name="図 7">
-            <a:extLst>
-              <a:ext uri="{FF2B5EF4-FFF2-40B4-BE49-F238E27FC236}">
-                <a16:creationId xmlns:a16="http://schemas.microsoft.com/office/drawing/2014/main" id="{C60C3470-23D4-43F0-BC82-8A64EEC90281}"/>
-              </a:ext>
-            </a:extLst>
-          </p:cNvPr>
-          <p:cNvPicPr>
-            <a:picLocks noChangeAspect="1"/>
-          </p:cNvPicPr>
-          <p:nvPr/>
-        </p:nvPicPr>
-        <p:blipFill>
-          <a:blip r:embed="rId3"/>
-          <a:stretch>
-            <a:fillRect/>
-          </a:stretch>
-        </p:blipFill>
-        <p:spPr>
-          <a:xfrm>
-            <a:off x="85725" y="910549"/>
-            <a:ext cx="6086476" cy="6858000"/>
-          </a:xfrm>
-          <a:prstGeom prst="rect">
-            <a:avLst/>
-          </a:prstGeom>
-        </p:spPr>
-      </p:pic>
-      <p:pic>
-        <p:nvPicPr>
-          <p:cNvPr id="10" name="図 9">
-            <a:extLst>
-              <a:ext uri="{FF2B5EF4-FFF2-40B4-BE49-F238E27FC236}">
-                <a16:creationId xmlns:a16="http://schemas.microsoft.com/office/drawing/2014/main" id="{939B8330-3DA0-47C8-ACDE-4B870CB5A81A}"/>
-              </a:ext>
-            </a:extLst>
-          </p:cNvPr>
-          <p:cNvPicPr>
-            <a:picLocks noChangeAspect="1"/>
-          </p:cNvPicPr>
-          <p:nvPr/>
-        </p:nvPicPr>
-        <p:blipFill>
-          <a:blip r:embed="rId4"/>
-          <a:stretch>
-            <a:fillRect/>
-          </a:stretch>
-        </p:blipFill>
-        <p:spPr>
-          <a:xfrm>
-            <a:off x="6620387" y="1367750"/>
-            <a:ext cx="6858000" cy="6858000"/>
-          </a:xfrm>
-          <a:prstGeom prst="rect">
-            <a:avLst/>
-          </a:prstGeom>
-        </p:spPr>
-      </p:pic>
-    </p:spTree>
-  </p:cSld>
-  <p:clrMapOvr>
-    <a:masterClrMapping/>
-  </p:clrMapOvr>
-</p:sld>
-</file>
-
 <file path=ppt/slides/slide5.xml><?xml version="1.0" encoding="utf-8"?>
 <p:sld xmlns:a="http://schemas.openxmlformats.org/drawingml/2006/main" xmlns:r="http://schemas.openxmlformats.org/officeDocument/2006/relationships" xmlns:p="http://schemas.openxmlformats.org/presentationml/2006/main">
   <p:cSld>
@@ -6397,7 +6530,7 @@
           <p:cNvPr id="3" name="正方形/長方形 2">
             <a:extLst>
               <a:ext uri="{FF2B5EF4-FFF2-40B4-BE49-F238E27FC236}">
-                <a16:creationId xmlns:a16="http://schemas.microsoft.com/office/drawing/2014/main" id="{7ED09CAE-1C4B-43BB-9B32-E9317E478F10}"/>
+                <a16:creationId xmlns:a16="http://schemas.microsoft.com/office/drawing/2014/main" id="{8EE8F76E-6904-409A-AC76-C9CCF9F1E885}"/>
               </a:ext>
             </a:extLst>
           </p:cNvPr>
@@ -6440,7 +6573,7 @@
                 <a:latin typeface="メイリオ" panose="020B0604030504040204" pitchFamily="50" charset="-128"/>
                 <a:ea typeface="メイリオ" panose="020B0604030504040204" pitchFamily="50" charset="-128"/>
               </a:rPr>
-              <a:t>ルール</a:t>
+              <a:t>操作方法</a:t>
             </a:r>
           </a:p>
         </p:txBody>
@@ -6450,7 +6583,7 @@
           <p:cNvPr id="2" name="正方形/長方形 1">
             <a:extLst>
               <a:ext uri="{FF2B5EF4-FFF2-40B4-BE49-F238E27FC236}">
-                <a16:creationId xmlns:a16="http://schemas.microsoft.com/office/drawing/2014/main" id="{D9033127-4D4D-4EC3-A27C-804E62C27528}"/>
+                <a16:creationId xmlns:a16="http://schemas.microsoft.com/office/drawing/2014/main" id="{528E3EEC-ED19-44E5-A90C-4BE60A2D4ABD}"/>
               </a:ext>
             </a:extLst>
           </p:cNvPr>
@@ -6459,8 +6592,8 @@
         </p:nvSpPr>
         <p:spPr>
           <a:xfrm>
-            <a:off x="4133851" y="996283"/>
-            <a:ext cx="7096125" cy="1215437"/>
+            <a:off x="184014" y="1550722"/>
+            <a:ext cx="1333499" cy="914400"/>
           </a:xfrm>
           <a:prstGeom prst="rect">
             <a:avLst/>
@@ -6484,55 +6617,23 @@
           <a:bodyPr rtlCol="0" anchor="ctr"/>
           <a:lstStyle/>
           <a:p>
-            <a:r>
-              <a:rPr lang="ja-JP" altLang="en-US" dirty="0">
-                <a:latin typeface="メイリオ" panose="020B0604030504040204" pitchFamily="50" charset="-128"/>
-                <a:ea typeface="メイリオ" panose="020B0604030504040204" pitchFamily="50" charset="-128"/>
-              </a:rPr>
-              <a:t>１　筆や乗り物を操作し、移動した後の軌跡でお手本を描く</a:t>
-            </a:r>
-            <a:endParaRPr lang="en-US" altLang="ja-JP" dirty="0">
-              <a:latin typeface="メイリオ" panose="020B0604030504040204" pitchFamily="50" charset="-128"/>
-              <a:ea typeface="メイリオ" panose="020B0604030504040204" pitchFamily="50" charset="-128"/>
-            </a:endParaRPr>
-          </a:p>
-          <a:p>
+            <a:pPr algn="ctr"/>
             <a:r>
               <a:rPr kumimoji="1" lang="ja-JP" altLang="en-US" dirty="0">
                 <a:latin typeface="メイリオ" panose="020B0604030504040204" pitchFamily="50" charset="-128"/>
                 <a:ea typeface="メイリオ" panose="020B0604030504040204" pitchFamily="50" charset="-128"/>
               </a:rPr>
-              <a:t>２　制限時間以内に作品を完成させる</a:t>
-            </a:r>
-            <a:endParaRPr kumimoji="1" lang="en-US" altLang="ja-JP" dirty="0">
-              <a:latin typeface="メイリオ" panose="020B0604030504040204" pitchFamily="50" charset="-128"/>
-              <a:ea typeface="メイリオ" panose="020B0604030504040204" pitchFamily="50" charset="-128"/>
-            </a:endParaRPr>
-          </a:p>
-          <a:p>
-            <a:r>
-              <a:rPr lang="ja-JP" altLang="en-US" dirty="0">
-                <a:latin typeface="メイリオ" panose="020B0604030504040204" pitchFamily="50" charset="-128"/>
-                <a:ea typeface="メイリオ" panose="020B0604030504040204" pitchFamily="50" charset="-128"/>
-              </a:rPr>
-              <a:t>３　書いた作品の点数が基準に満たない場合　ゲームオーバー</a:t>
-            </a:r>
-            <a:endParaRPr lang="en-US" altLang="ja-JP" dirty="0">
-              <a:latin typeface="メイリオ" panose="020B0604030504040204" pitchFamily="50" charset="-128"/>
-              <a:ea typeface="メイリオ" panose="020B0604030504040204" pitchFamily="50" charset="-128"/>
-            </a:endParaRPr>
-          </a:p>
-          <a:p>
-            <a:endParaRPr kumimoji="1" lang="ja-JP" altLang="en-US" dirty="0"/>
-          </a:p>
-        </p:txBody>
-      </p:sp>
-      <p:sp>
-        <p:nvSpPr>
-          <p:cNvPr id="6" name="正方形/長方形 5">
-            <a:extLst>
-              <a:ext uri="{FF2B5EF4-FFF2-40B4-BE49-F238E27FC236}">
-                <a16:creationId xmlns:a16="http://schemas.microsoft.com/office/drawing/2014/main" id="{A30C44BD-C3CF-4D21-8AC1-84E72A8C316D}"/>
+              <a:t>マウス操作</a:t>
+            </a:r>
+          </a:p>
+        </p:txBody>
+      </p:sp>
+      <p:sp>
+        <p:nvSpPr>
+          <p:cNvPr id="4" name="正方形/長方形 3">
+            <a:extLst>
+              <a:ext uri="{FF2B5EF4-FFF2-40B4-BE49-F238E27FC236}">
+                <a16:creationId xmlns:a16="http://schemas.microsoft.com/office/drawing/2014/main" id="{B1F8B859-E7F9-45FF-8D65-1077BE9574CA}"/>
               </a:ext>
             </a:extLst>
           </p:cNvPr>
@@ -6541,202 +6642,8 @@
         </p:nvSpPr>
         <p:spPr>
           <a:xfrm>
-            <a:off x="4133845" y="453350"/>
-            <a:ext cx="7096126" cy="542933"/>
-          </a:xfrm>
-          <a:prstGeom prst="rect">
-            <a:avLst/>
-          </a:prstGeom>
-          <a:ln>
-            <a:solidFill>
-              <a:schemeClr val="tx1"/>
-            </a:solidFill>
-          </a:ln>
-        </p:spPr>
-        <p:style>
-          <a:lnRef idx="2">
-            <a:schemeClr val="accent6"/>
-          </a:lnRef>
-          <a:fillRef idx="1">
-            <a:schemeClr val="lt1"/>
-          </a:fillRef>
-          <a:effectRef idx="0">
-            <a:schemeClr val="accent6"/>
-          </a:effectRef>
-          <a:fontRef idx="minor">
-            <a:schemeClr val="dk1"/>
-          </a:fontRef>
-        </p:style>
-        <p:txBody>
-          <a:bodyPr rtlCol="0" anchor="ctr"/>
-          <a:lstStyle/>
-          <a:p>
-            <a:pPr algn="ctr"/>
-            <a:r>
-              <a:rPr kumimoji="1" lang="ja-JP" altLang="en-US" sz="3600" dirty="0">
-                <a:solidFill>
-                  <a:srgbClr val="FF0000"/>
-                </a:solidFill>
-                <a:latin typeface="メイリオ" panose="020B0604030504040204" pitchFamily="50" charset="-128"/>
-                <a:ea typeface="メイリオ" panose="020B0604030504040204" pitchFamily="50" charset="-128"/>
-              </a:rPr>
-              <a:t>お手本モード</a:t>
-            </a:r>
-          </a:p>
-        </p:txBody>
-      </p:sp>
-      <p:sp>
-        <p:nvSpPr>
-          <p:cNvPr id="7" name="正方形/長方形 6">
-            <a:extLst>
-              <a:ext uri="{FF2B5EF4-FFF2-40B4-BE49-F238E27FC236}">
-                <a16:creationId xmlns:a16="http://schemas.microsoft.com/office/drawing/2014/main" id="{6A95D87C-FEF3-467E-B1FF-6608DFB43B23}"/>
-              </a:ext>
-            </a:extLst>
-          </p:cNvPr>
-          <p:cNvSpPr/>
-          <p:nvPr/>
-        </p:nvSpPr>
-        <p:spPr>
-          <a:xfrm>
-            <a:off x="4133850" y="2755553"/>
-            <a:ext cx="7096126" cy="542934"/>
-          </a:xfrm>
-          <a:prstGeom prst="rect">
-            <a:avLst/>
-          </a:prstGeom>
-          <a:ln>
-            <a:solidFill>
-              <a:schemeClr val="tx1"/>
-            </a:solidFill>
-          </a:ln>
-        </p:spPr>
-        <p:style>
-          <a:lnRef idx="2">
-            <a:schemeClr val="accent6"/>
-          </a:lnRef>
-          <a:fillRef idx="1">
-            <a:schemeClr val="lt1"/>
-          </a:fillRef>
-          <a:effectRef idx="0">
-            <a:schemeClr val="accent6"/>
-          </a:effectRef>
-          <a:fontRef idx="minor">
-            <a:schemeClr val="dk1"/>
-          </a:fontRef>
-        </p:style>
-        <p:txBody>
-          <a:bodyPr rtlCol="0" anchor="ctr"/>
-          <a:lstStyle/>
-          <a:p>
-            <a:pPr algn="ctr"/>
-            <a:r>
-              <a:rPr lang="ja-JP" altLang="en-US" sz="3600" dirty="0">
-                <a:solidFill>
-                  <a:srgbClr val="FF0000"/>
-                </a:solidFill>
-                <a:latin typeface="メイリオ" panose="020B0604030504040204" pitchFamily="50" charset="-128"/>
-                <a:ea typeface="メイリオ" panose="020B0604030504040204" pitchFamily="50" charset="-128"/>
-              </a:rPr>
-              <a:t>自由</a:t>
-            </a:r>
-            <a:r>
-              <a:rPr kumimoji="1" lang="ja-JP" altLang="en-US" sz="3600" dirty="0">
-                <a:solidFill>
-                  <a:srgbClr val="FF0000"/>
-                </a:solidFill>
-                <a:latin typeface="メイリオ" panose="020B0604030504040204" pitchFamily="50" charset="-128"/>
-                <a:ea typeface="メイリオ" panose="020B0604030504040204" pitchFamily="50" charset="-128"/>
-              </a:rPr>
-              <a:t>モード</a:t>
-            </a:r>
-          </a:p>
-        </p:txBody>
-      </p:sp>
-      <p:sp>
-        <p:nvSpPr>
-          <p:cNvPr id="9" name="正方形/長方形 8">
-            <a:extLst>
-              <a:ext uri="{FF2B5EF4-FFF2-40B4-BE49-F238E27FC236}">
-                <a16:creationId xmlns:a16="http://schemas.microsoft.com/office/drawing/2014/main" id="{00039B03-7452-4948-AB40-CEC2825954EC}"/>
-              </a:ext>
-            </a:extLst>
-          </p:cNvPr>
-          <p:cNvSpPr/>
-          <p:nvPr/>
-        </p:nvSpPr>
-        <p:spPr>
-          <a:xfrm>
-            <a:off x="4133850" y="4699570"/>
-            <a:ext cx="7096126" cy="542933"/>
-          </a:xfrm>
-          <a:prstGeom prst="rect">
-            <a:avLst/>
-          </a:prstGeom>
-          <a:ln>
-            <a:solidFill>
-              <a:schemeClr val="tx1"/>
-            </a:solidFill>
-          </a:ln>
-        </p:spPr>
-        <p:style>
-          <a:lnRef idx="2">
-            <a:schemeClr val="accent6"/>
-          </a:lnRef>
-          <a:fillRef idx="1">
-            <a:schemeClr val="lt1"/>
-          </a:fillRef>
-          <a:effectRef idx="0">
-            <a:schemeClr val="accent6"/>
-          </a:effectRef>
-          <a:fontRef idx="minor">
-            <a:schemeClr val="dk1"/>
-          </a:fontRef>
-        </p:style>
-        <p:txBody>
-          <a:bodyPr rtlCol="0" anchor="ctr"/>
-          <a:lstStyle/>
-          <a:p>
-            <a:pPr algn="ctr"/>
-            <a:r>
-              <a:rPr lang="ja-JP" altLang="en-US" sz="3600" dirty="0">
-                <a:solidFill>
-                  <a:srgbClr val="FF0000"/>
-                </a:solidFill>
-                <a:latin typeface="メイリオ" panose="020B0604030504040204" pitchFamily="50" charset="-128"/>
-                <a:ea typeface="メイリオ" panose="020B0604030504040204" pitchFamily="50" charset="-128"/>
-              </a:rPr>
-              <a:t>お題</a:t>
-            </a:r>
-            <a:r>
-              <a:rPr kumimoji="1" lang="ja-JP" altLang="en-US" sz="3600" dirty="0">
-                <a:solidFill>
-                  <a:srgbClr val="FF0000"/>
-                </a:solidFill>
-                <a:latin typeface="メイリオ" panose="020B0604030504040204" pitchFamily="50" charset="-128"/>
-                <a:ea typeface="メイリオ" panose="020B0604030504040204" pitchFamily="50" charset="-128"/>
-              </a:rPr>
-              <a:t>モード</a:t>
-            </a:r>
-          </a:p>
-        </p:txBody>
-      </p:sp>
-      <p:sp>
-        <p:nvSpPr>
-          <p:cNvPr id="11" name="正方形/長方形 10">
-            <a:extLst>
-              <a:ext uri="{FF2B5EF4-FFF2-40B4-BE49-F238E27FC236}">
-                <a16:creationId xmlns:a16="http://schemas.microsoft.com/office/drawing/2014/main" id="{13BABEA7-2FB4-4D0E-9CE5-C9EE47AFD26F}"/>
-              </a:ext>
-            </a:extLst>
-          </p:cNvPr>
-          <p:cNvSpPr/>
-          <p:nvPr/>
-        </p:nvSpPr>
-        <p:spPr>
-          <a:xfrm>
-            <a:off x="4133851" y="5242503"/>
-            <a:ext cx="7096125" cy="914400"/>
+            <a:off x="6096000" y="1464997"/>
+            <a:ext cx="2066925" cy="914400"/>
           </a:xfrm>
           <a:prstGeom prst="rect">
             <a:avLst/>
@@ -6760,67 +6667,88 @@
           <a:bodyPr rtlCol="0" anchor="ctr"/>
           <a:lstStyle/>
           <a:p>
+            <a:pPr algn="ctr"/>
+            <a:r>
+              <a:rPr kumimoji="1" lang="ja-JP" altLang="en-US" dirty="0">
+                <a:latin typeface="メイリオ" panose="020B0604030504040204" pitchFamily="50" charset="-128"/>
+                <a:ea typeface="メイリオ" panose="020B0604030504040204" pitchFamily="50" charset="-128"/>
+              </a:rPr>
+              <a:t>右クリックで</a:t>
+            </a:r>
             <a:r>
               <a:rPr lang="ja-JP" altLang="en-US" dirty="0">
                 <a:latin typeface="メイリオ" panose="020B0604030504040204" pitchFamily="50" charset="-128"/>
                 <a:ea typeface="メイリオ" panose="020B0604030504040204" pitchFamily="50" charset="-128"/>
               </a:rPr>
-              <a:t>１　出されたお題に沿った絵を、自由な描き方で完成させる</a:t>
-            </a:r>
-            <a:endParaRPr kumimoji="1" lang="ja-JP" altLang="en-US" dirty="0"/>
-          </a:p>
-        </p:txBody>
-      </p:sp>
-      <p:sp>
-        <p:nvSpPr>
-          <p:cNvPr id="12" name="正方形/長方形 11">
-            <a:extLst>
-              <a:ext uri="{FF2B5EF4-FFF2-40B4-BE49-F238E27FC236}">
-                <a16:creationId xmlns:a16="http://schemas.microsoft.com/office/drawing/2014/main" id="{C0E15D93-A5A7-4816-B984-006258B007B4}"/>
-              </a:ext>
-            </a:extLst>
-          </p:cNvPr>
-          <p:cNvSpPr/>
+              <a:t>加速</a:t>
+            </a:r>
+            <a:endParaRPr kumimoji="1" lang="ja-JP" altLang="en-US" dirty="0">
+              <a:latin typeface="メイリオ" panose="020B0604030504040204" pitchFamily="50" charset="-128"/>
+              <a:ea typeface="メイリオ" panose="020B0604030504040204" pitchFamily="50" charset="-128"/>
+            </a:endParaRPr>
+          </a:p>
+        </p:txBody>
+      </p:sp>
+      <p:pic>
+        <p:nvPicPr>
+          <p:cNvPr id="8" name="図 7">
+            <a:extLst>
+              <a:ext uri="{FF2B5EF4-FFF2-40B4-BE49-F238E27FC236}">
+                <a16:creationId xmlns:a16="http://schemas.microsoft.com/office/drawing/2014/main" id="{C60C3470-23D4-43F0-BC82-8A64EEC90281}"/>
+              </a:ext>
+            </a:extLst>
+          </p:cNvPr>
+          <p:cNvPicPr>
+            <a:picLocks noChangeAspect="1"/>
+          </p:cNvPicPr>
           <p:nvPr/>
-        </p:nvSpPr>
-        <p:spPr>
-          <a:xfrm>
-            <a:off x="4133844" y="3241337"/>
-            <a:ext cx="7096125" cy="914400"/>
+        </p:nvPicPr>
+        <p:blipFill>
+          <a:blip r:embed="rId3"/>
+          <a:stretch>
+            <a:fillRect/>
+          </a:stretch>
+        </p:blipFill>
+        <p:spPr>
+          <a:xfrm>
+            <a:off x="85725" y="910549"/>
+            <a:ext cx="6086476" cy="6858000"/>
           </a:xfrm>
           <a:prstGeom prst="rect">
             <a:avLst/>
           </a:prstGeom>
         </p:spPr>
-        <p:style>
-          <a:lnRef idx="2">
-            <a:schemeClr val="dk1"/>
-          </a:lnRef>
-          <a:fillRef idx="1">
-            <a:schemeClr val="lt1"/>
-          </a:fillRef>
-          <a:effectRef idx="0">
-            <a:schemeClr val="dk1"/>
-          </a:effectRef>
-          <a:fontRef idx="minor">
-            <a:schemeClr val="dk1"/>
-          </a:fontRef>
-        </p:style>
-        <p:txBody>
-          <a:bodyPr rtlCol="0" anchor="ctr"/>
-          <a:lstStyle/>
-          <a:p>
-            <a:r>
-              <a:rPr lang="ja-JP" altLang="en-US" dirty="0">
-                <a:latin typeface="メイリオ" panose="020B0604030504040204" pitchFamily="50" charset="-128"/>
-                <a:ea typeface="メイリオ" panose="020B0604030504040204" pitchFamily="50" charset="-128"/>
-              </a:rPr>
-              <a:t>１　筆を操作し、自由に書く</a:t>
-            </a:r>
-            <a:endParaRPr kumimoji="1" lang="ja-JP" altLang="en-US" dirty="0"/>
-          </a:p>
-        </p:txBody>
-      </p:sp>
+      </p:pic>
+      <p:pic>
+        <p:nvPicPr>
+          <p:cNvPr id="10" name="図 9">
+            <a:extLst>
+              <a:ext uri="{FF2B5EF4-FFF2-40B4-BE49-F238E27FC236}">
+                <a16:creationId xmlns:a16="http://schemas.microsoft.com/office/drawing/2014/main" id="{939B8330-3DA0-47C8-ACDE-4B870CB5A81A}"/>
+              </a:ext>
+            </a:extLst>
+          </p:cNvPr>
+          <p:cNvPicPr>
+            <a:picLocks noChangeAspect="1"/>
+          </p:cNvPicPr>
+          <p:nvPr/>
+        </p:nvPicPr>
+        <p:blipFill>
+          <a:blip r:embed="rId4"/>
+          <a:stretch>
+            <a:fillRect/>
+          </a:stretch>
+        </p:blipFill>
+        <p:spPr>
+          <a:xfrm>
+            <a:off x="6620387" y="1367750"/>
+            <a:ext cx="6858000" cy="6858000"/>
+          </a:xfrm>
+          <a:prstGeom prst="rect">
+            <a:avLst/>
+          </a:prstGeom>
+        </p:spPr>
+      </p:pic>
     </p:spTree>
   </p:cSld>
   <p:clrMapOvr>
@@ -6851,7 +6779,7 @@
           <p:cNvPr id="3" name="正方形/長方形 2">
             <a:extLst>
               <a:ext uri="{FF2B5EF4-FFF2-40B4-BE49-F238E27FC236}">
-                <a16:creationId xmlns:a16="http://schemas.microsoft.com/office/drawing/2014/main" id="{70EAE7B8-2E7A-4AF5-9F80-324BE3D322C8}"/>
+                <a16:creationId xmlns:a16="http://schemas.microsoft.com/office/drawing/2014/main" id="{7ED09CAE-1C4B-43BB-9B32-E9317E478F10}"/>
               </a:ext>
             </a:extLst>
           </p:cNvPr>
@@ -6894,17 +6822,17 @@
                 <a:latin typeface="メイリオ" panose="020B0604030504040204" pitchFamily="50" charset="-128"/>
                 <a:ea typeface="メイリオ" panose="020B0604030504040204" pitchFamily="50" charset="-128"/>
               </a:rPr>
-              <a:t>ゲームの流れ</a:t>
-            </a:r>
-          </a:p>
-        </p:txBody>
-      </p:sp>
-      <p:sp>
-        <p:nvSpPr>
-          <p:cNvPr id="4" name="正方形/長方形 3">
-            <a:extLst>
-              <a:ext uri="{FF2B5EF4-FFF2-40B4-BE49-F238E27FC236}">
-                <a16:creationId xmlns:a16="http://schemas.microsoft.com/office/drawing/2014/main" id="{2A6CE379-9DB5-4E43-AE4A-565D343B3DEF}"/>
+              <a:t>ルール</a:t>
+            </a:r>
+          </a:p>
+        </p:txBody>
+      </p:sp>
+      <p:sp>
+        <p:nvSpPr>
+          <p:cNvPr id="2" name="正方形/長方形 1">
+            <a:extLst>
+              <a:ext uri="{FF2B5EF4-FFF2-40B4-BE49-F238E27FC236}">
+                <a16:creationId xmlns:a16="http://schemas.microsoft.com/office/drawing/2014/main" id="{D9033127-4D4D-4EC3-A27C-804E62C27528}"/>
               </a:ext>
             </a:extLst>
           </p:cNvPr>
@@ -6913,8 +6841,90 @@
         </p:nvSpPr>
         <p:spPr>
           <a:xfrm>
-            <a:off x="363240" y="3429000"/>
-            <a:ext cx="1461985" cy="1428750"/>
+            <a:off x="4133851" y="996283"/>
+            <a:ext cx="7096125" cy="1215437"/>
+          </a:xfrm>
+          <a:prstGeom prst="rect">
+            <a:avLst/>
+          </a:prstGeom>
+        </p:spPr>
+        <p:style>
+          <a:lnRef idx="2">
+            <a:schemeClr val="dk1"/>
+          </a:lnRef>
+          <a:fillRef idx="1">
+            <a:schemeClr val="lt1"/>
+          </a:fillRef>
+          <a:effectRef idx="0">
+            <a:schemeClr val="dk1"/>
+          </a:effectRef>
+          <a:fontRef idx="minor">
+            <a:schemeClr val="dk1"/>
+          </a:fontRef>
+        </p:style>
+        <p:txBody>
+          <a:bodyPr rtlCol="0" anchor="ctr"/>
+          <a:lstStyle/>
+          <a:p>
+            <a:r>
+              <a:rPr lang="ja-JP" altLang="en-US" dirty="0">
+                <a:latin typeface="メイリオ" panose="020B0604030504040204" pitchFamily="50" charset="-128"/>
+                <a:ea typeface="メイリオ" panose="020B0604030504040204" pitchFamily="50" charset="-128"/>
+              </a:rPr>
+              <a:t>１　筆や乗り物を操作し、移動した後の軌跡でお手本を描く</a:t>
+            </a:r>
+            <a:endParaRPr lang="en-US" altLang="ja-JP" dirty="0">
+              <a:latin typeface="メイリオ" panose="020B0604030504040204" pitchFamily="50" charset="-128"/>
+              <a:ea typeface="メイリオ" panose="020B0604030504040204" pitchFamily="50" charset="-128"/>
+            </a:endParaRPr>
+          </a:p>
+          <a:p>
+            <a:r>
+              <a:rPr kumimoji="1" lang="ja-JP" altLang="en-US" dirty="0">
+                <a:latin typeface="メイリオ" panose="020B0604030504040204" pitchFamily="50" charset="-128"/>
+                <a:ea typeface="メイリオ" panose="020B0604030504040204" pitchFamily="50" charset="-128"/>
+              </a:rPr>
+              <a:t>２　制限時間以内に作品を完成させる</a:t>
+            </a:r>
+            <a:endParaRPr kumimoji="1" lang="en-US" altLang="ja-JP" dirty="0">
+              <a:latin typeface="メイリオ" panose="020B0604030504040204" pitchFamily="50" charset="-128"/>
+              <a:ea typeface="メイリオ" panose="020B0604030504040204" pitchFamily="50" charset="-128"/>
+            </a:endParaRPr>
+          </a:p>
+          <a:p>
+            <a:r>
+              <a:rPr lang="ja-JP" altLang="en-US" dirty="0">
+                <a:latin typeface="メイリオ" panose="020B0604030504040204" pitchFamily="50" charset="-128"/>
+                <a:ea typeface="メイリオ" panose="020B0604030504040204" pitchFamily="50" charset="-128"/>
+              </a:rPr>
+              <a:t>３　書いた作品の点数が基準に満たない場合　ゲームオーバー</a:t>
+            </a:r>
+            <a:endParaRPr lang="en-US" altLang="ja-JP" dirty="0">
+              <a:latin typeface="メイリオ" panose="020B0604030504040204" pitchFamily="50" charset="-128"/>
+              <a:ea typeface="メイリオ" panose="020B0604030504040204" pitchFamily="50" charset="-128"/>
+            </a:endParaRPr>
+          </a:p>
+          <a:p>
+            <a:endParaRPr kumimoji="1" lang="ja-JP" altLang="en-US" dirty="0"/>
+          </a:p>
+        </p:txBody>
+      </p:sp>
+      <p:sp>
+        <p:nvSpPr>
+          <p:cNvPr id="6" name="正方形/長方形 5">
+            <a:extLst>
+              <a:ext uri="{FF2B5EF4-FFF2-40B4-BE49-F238E27FC236}">
+                <a16:creationId xmlns:a16="http://schemas.microsoft.com/office/drawing/2014/main" id="{A30C44BD-C3CF-4D21-8AC1-84E72A8C316D}"/>
+              </a:ext>
+            </a:extLst>
+          </p:cNvPr>
+          <p:cNvSpPr/>
+          <p:nvPr/>
+        </p:nvSpPr>
+        <p:spPr>
+          <a:xfrm>
+            <a:off x="4133845" y="453350"/>
+            <a:ext cx="7096126" cy="542933"/>
           </a:xfrm>
           <a:prstGeom prst="rect">
             <a:avLst/>
@@ -6945,21 +6955,24 @@
           <a:p>
             <a:pPr algn="ctr"/>
             <a:r>
-              <a:rPr kumimoji="1" lang="ja-JP" altLang="en-US" sz="2400" dirty="0">
+              <a:rPr kumimoji="1" lang="ja-JP" altLang="en-US" sz="3600" dirty="0">
+                <a:solidFill>
+                  <a:srgbClr val="FF0000"/>
+                </a:solidFill>
                 <a:latin typeface="メイリオ" panose="020B0604030504040204" pitchFamily="50" charset="-128"/>
                 <a:ea typeface="メイリオ" panose="020B0604030504040204" pitchFamily="50" charset="-128"/>
               </a:rPr>
-              <a:t>お手本を確認</a:t>
-            </a:r>
-          </a:p>
-        </p:txBody>
-      </p:sp>
-      <p:sp>
-        <p:nvSpPr>
-          <p:cNvPr id="5" name="正方形/長方形 4">
-            <a:extLst>
-              <a:ext uri="{FF2B5EF4-FFF2-40B4-BE49-F238E27FC236}">
-                <a16:creationId xmlns:a16="http://schemas.microsoft.com/office/drawing/2014/main" id="{91870252-9069-4CF2-BDB1-5539DA6535CC}"/>
+              <a:t>お手本モード</a:t>
+            </a:r>
+          </a:p>
+        </p:txBody>
+      </p:sp>
+      <p:sp>
+        <p:nvSpPr>
+          <p:cNvPr id="7" name="正方形/長方形 6">
+            <a:extLst>
+              <a:ext uri="{FF2B5EF4-FFF2-40B4-BE49-F238E27FC236}">
+                <a16:creationId xmlns:a16="http://schemas.microsoft.com/office/drawing/2014/main" id="{6A95D87C-FEF3-467E-B1FF-6608DFB43B23}"/>
               </a:ext>
             </a:extLst>
           </p:cNvPr>
@@ -6968,8 +6981,8 @@
         </p:nvSpPr>
         <p:spPr>
           <a:xfrm>
-            <a:off x="3239547" y="3429000"/>
-            <a:ext cx="1461985" cy="1428750"/>
+            <a:off x="4133850" y="2755553"/>
+            <a:ext cx="7096126" cy="542934"/>
           </a:xfrm>
           <a:prstGeom prst="rect">
             <a:avLst/>
@@ -7000,21 +7013,34 @@
           <a:p>
             <a:pPr algn="ctr"/>
             <a:r>
-              <a:rPr kumimoji="1" lang="ja-JP" altLang="en-US" sz="2400" dirty="0">
+              <a:rPr lang="ja-JP" altLang="en-US" sz="3600" dirty="0">
+                <a:solidFill>
+                  <a:srgbClr val="FF0000"/>
+                </a:solidFill>
                 <a:latin typeface="メイリオ" panose="020B0604030504040204" pitchFamily="50" charset="-128"/>
                 <a:ea typeface="メイリオ" panose="020B0604030504040204" pitchFamily="50" charset="-128"/>
               </a:rPr>
-              <a:t>描く</a:t>
-            </a:r>
-          </a:p>
-        </p:txBody>
-      </p:sp>
-      <p:sp>
-        <p:nvSpPr>
-          <p:cNvPr id="6" name="正方形/長方形 5">
-            <a:extLst>
-              <a:ext uri="{FF2B5EF4-FFF2-40B4-BE49-F238E27FC236}">
-                <a16:creationId xmlns:a16="http://schemas.microsoft.com/office/drawing/2014/main" id="{595A4AA4-1310-49B0-B0FA-38D93BAA4E46}"/>
+              <a:t>自由</a:t>
+            </a:r>
+            <a:r>
+              <a:rPr kumimoji="1" lang="ja-JP" altLang="en-US" sz="3600" dirty="0">
+                <a:solidFill>
+                  <a:srgbClr val="FF0000"/>
+                </a:solidFill>
+                <a:latin typeface="メイリオ" panose="020B0604030504040204" pitchFamily="50" charset="-128"/>
+                <a:ea typeface="メイリオ" panose="020B0604030504040204" pitchFamily="50" charset="-128"/>
+              </a:rPr>
+              <a:t>モード</a:t>
+            </a:r>
+          </a:p>
+        </p:txBody>
+      </p:sp>
+      <p:sp>
+        <p:nvSpPr>
+          <p:cNvPr id="9" name="正方形/長方形 8">
+            <a:extLst>
+              <a:ext uri="{FF2B5EF4-FFF2-40B4-BE49-F238E27FC236}">
+                <a16:creationId xmlns:a16="http://schemas.microsoft.com/office/drawing/2014/main" id="{00039B03-7452-4948-AB40-CEC2825954EC}"/>
               </a:ext>
             </a:extLst>
           </p:cNvPr>
@@ -7023,8 +7049,8 @@
         </p:nvSpPr>
         <p:spPr>
           <a:xfrm>
-            <a:off x="6083425" y="3429000"/>
-            <a:ext cx="1461985" cy="1428750"/>
+            <a:off x="4133850" y="4699570"/>
+            <a:ext cx="7096126" cy="542933"/>
           </a:xfrm>
           <a:prstGeom prst="rect">
             <a:avLst/>
@@ -7055,25 +7081,34 @@
           <a:p>
             <a:pPr algn="ctr"/>
             <a:r>
-              <a:rPr lang="ja-JP" altLang="en-US" sz="2400" dirty="0">
+              <a:rPr lang="ja-JP" altLang="en-US" sz="3600" dirty="0">
+                <a:solidFill>
+                  <a:srgbClr val="FF0000"/>
+                </a:solidFill>
                 <a:latin typeface="メイリオ" panose="020B0604030504040204" pitchFamily="50" charset="-128"/>
                 <a:ea typeface="メイリオ" panose="020B0604030504040204" pitchFamily="50" charset="-128"/>
               </a:rPr>
-              <a:t>採点</a:t>
-            </a:r>
-            <a:endParaRPr kumimoji="1" lang="ja-JP" altLang="en-US" sz="2400" dirty="0">
-              <a:latin typeface="メイリオ" panose="020B0604030504040204" pitchFamily="50" charset="-128"/>
-              <a:ea typeface="メイリオ" panose="020B0604030504040204" pitchFamily="50" charset="-128"/>
-            </a:endParaRPr>
-          </a:p>
-        </p:txBody>
-      </p:sp>
-      <p:sp>
-        <p:nvSpPr>
-          <p:cNvPr id="8" name="矢印: 右 7">
-            <a:extLst>
-              <a:ext uri="{FF2B5EF4-FFF2-40B4-BE49-F238E27FC236}">
-                <a16:creationId xmlns:a16="http://schemas.microsoft.com/office/drawing/2014/main" id="{B583C0F8-8C54-4417-9EE0-84A0AF84E0DF}"/>
+              <a:t>お題</a:t>
+            </a:r>
+            <a:r>
+              <a:rPr kumimoji="1" lang="ja-JP" altLang="en-US" sz="3600" dirty="0">
+                <a:solidFill>
+                  <a:srgbClr val="FF0000"/>
+                </a:solidFill>
+                <a:latin typeface="メイリオ" panose="020B0604030504040204" pitchFamily="50" charset="-128"/>
+                <a:ea typeface="メイリオ" panose="020B0604030504040204" pitchFamily="50" charset="-128"/>
+              </a:rPr>
+              <a:t>モード</a:t>
+            </a:r>
+          </a:p>
+        </p:txBody>
+      </p:sp>
+      <p:sp>
+        <p:nvSpPr>
+          <p:cNvPr id="11" name="正方形/長方形 10">
+            <a:extLst>
+              <a:ext uri="{FF2B5EF4-FFF2-40B4-BE49-F238E27FC236}">
+                <a16:creationId xmlns:a16="http://schemas.microsoft.com/office/drawing/2014/main" id="{13BABEA7-2FB4-4D0E-9CE5-C9EE47AFD26F}"/>
               </a:ext>
             </a:extLst>
           </p:cNvPr>
@@ -7082,47 +7117,48 @@
         </p:nvSpPr>
         <p:spPr>
           <a:xfrm>
-            <a:off x="2071585" y="3906774"/>
-            <a:ext cx="978408" cy="484632"/>
-          </a:xfrm>
-          <a:prstGeom prst="rightArrow">
+            <a:off x="4133851" y="5242503"/>
+            <a:ext cx="7096125" cy="914400"/>
+          </a:xfrm>
+          <a:prstGeom prst="rect">
             <a:avLst/>
           </a:prstGeom>
-          <a:solidFill>
-            <a:srgbClr val="FF0000"/>
-          </a:solidFill>
         </p:spPr>
         <p:style>
           <a:lnRef idx="2">
-            <a:schemeClr val="dk1">
-              <a:shade val="50000"/>
-            </a:schemeClr>
+            <a:schemeClr val="dk1"/>
           </a:lnRef>
           <a:fillRef idx="1">
-            <a:schemeClr val="dk1"/>
+            <a:schemeClr val="lt1"/>
           </a:fillRef>
           <a:effectRef idx="0">
             <a:schemeClr val="dk1"/>
           </a:effectRef>
           <a:fontRef idx="minor">
-            <a:schemeClr val="lt1"/>
+            <a:schemeClr val="dk1"/>
           </a:fontRef>
         </p:style>
         <p:txBody>
           <a:bodyPr rtlCol="0" anchor="ctr"/>
           <a:lstStyle/>
           <a:p>
-            <a:pPr algn="ctr"/>
+            <a:r>
+              <a:rPr lang="ja-JP" altLang="en-US" dirty="0">
+                <a:latin typeface="メイリオ" panose="020B0604030504040204" pitchFamily="50" charset="-128"/>
+                <a:ea typeface="メイリオ" panose="020B0604030504040204" pitchFamily="50" charset="-128"/>
+              </a:rPr>
+              <a:t>１　出されたお題に沿った絵を、自由な描き方で完成させる</a:t>
+            </a:r>
             <a:endParaRPr kumimoji="1" lang="ja-JP" altLang="en-US" dirty="0"/>
           </a:p>
         </p:txBody>
       </p:sp>
       <p:sp>
         <p:nvSpPr>
-          <p:cNvPr id="9" name="矢印: 右 8">
-            <a:extLst>
-              <a:ext uri="{FF2B5EF4-FFF2-40B4-BE49-F238E27FC236}">
-                <a16:creationId xmlns:a16="http://schemas.microsoft.com/office/drawing/2014/main" id="{0D6B0945-959E-46D4-9780-A6377E1640D8}"/>
+          <p:cNvPr id="12" name="正方形/長方形 11">
+            <a:extLst>
+              <a:ext uri="{FF2B5EF4-FFF2-40B4-BE49-F238E27FC236}">
+                <a16:creationId xmlns:a16="http://schemas.microsoft.com/office/drawing/2014/main" id="{C0E15D93-A5A7-4816-B984-006258B007B4}"/>
               </a:ext>
             </a:extLst>
           </p:cNvPr>
@@ -7131,176 +7167,24 @@
         </p:nvSpPr>
         <p:spPr>
           <a:xfrm>
-            <a:off x="4947484" y="3874770"/>
-            <a:ext cx="978408" cy="484632"/>
-          </a:xfrm>
-          <a:prstGeom prst="rightArrow">
+            <a:off x="4133844" y="3241337"/>
+            <a:ext cx="7096125" cy="914400"/>
+          </a:xfrm>
+          <a:prstGeom prst="rect">
             <a:avLst/>
           </a:prstGeom>
-          <a:solidFill>
-            <a:srgbClr val="FF0000"/>
-          </a:solidFill>
         </p:spPr>
         <p:style>
           <a:lnRef idx="2">
-            <a:schemeClr val="accent1">
-              <a:shade val="50000"/>
-            </a:schemeClr>
+            <a:schemeClr val="dk1"/>
           </a:lnRef>
           <a:fillRef idx="1">
-            <a:schemeClr val="accent1"/>
-          </a:fillRef>
-          <a:effectRef idx="0">
-            <a:schemeClr val="accent1"/>
-          </a:effectRef>
-          <a:fontRef idx="minor">
             <a:schemeClr val="lt1"/>
-          </a:fontRef>
-        </p:style>
-        <p:txBody>
-          <a:bodyPr rtlCol="0" anchor="ctr"/>
-          <a:lstStyle/>
-          <a:p>
-            <a:pPr algn="ctr"/>
-            <a:endParaRPr kumimoji="1" lang="ja-JP" altLang="en-US"/>
-          </a:p>
-        </p:txBody>
-      </p:sp>
-      <p:sp>
-        <p:nvSpPr>
-          <p:cNvPr id="11" name="矢印: 右 10">
-            <a:extLst>
-              <a:ext uri="{FF2B5EF4-FFF2-40B4-BE49-F238E27FC236}">
-                <a16:creationId xmlns:a16="http://schemas.microsoft.com/office/drawing/2014/main" id="{0E396D52-BBC9-4447-B99D-71B7CC888F33}"/>
-              </a:ext>
-            </a:extLst>
-          </p:cNvPr>
-          <p:cNvSpPr/>
-          <p:nvPr/>
-        </p:nvSpPr>
-        <p:spPr>
-          <a:xfrm>
-            <a:off x="8438099" y="2535549"/>
-            <a:ext cx="978408" cy="484632"/>
-          </a:xfrm>
-          <a:prstGeom prst="rightArrow">
-            <a:avLst/>
-          </a:prstGeom>
-          <a:solidFill>
-            <a:srgbClr val="FF0000"/>
-          </a:solidFill>
-        </p:spPr>
-        <p:style>
-          <a:lnRef idx="2">
-            <a:schemeClr val="accent1">
-              <a:shade val="50000"/>
-            </a:schemeClr>
-          </a:lnRef>
-          <a:fillRef idx="1">
-            <a:schemeClr val="accent1"/>
-          </a:fillRef>
-          <a:effectRef idx="0">
-            <a:schemeClr val="accent1"/>
-          </a:effectRef>
-          <a:fontRef idx="minor">
-            <a:schemeClr val="lt1"/>
-          </a:fontRef>
-        </p:style>
-        <p:txBody>
-          <a:bodyPr rtlCol="0" anchor="ctr"/>
-          <a:lstStyle/>
-          <a:p>
-            <a:pPr algn="ctr"/>
-            <a:endParaRPr kumimoji="1" lang="ja-JP" altLang="en-US" dirty="0"/>
-          </a:p>
-        </p:txBody>
-      </p:sp>
-      <p:sp>
-        <p:nvSpPr>
-          <p:cNvPr id="13" name="矢印: 右 12">
-            <a:extLst>
-              <a:ext uri="{FF2B5EF4-FFF2-40B4-BE49-F238E27FC236}">
-                <a16:creationId xmlns:a16="http://schemas.microsoft.com/office/drawing/2014/main" id="{E2305F4F-61DB-4FA5-990D-0B147BC64A1D}"/>
-              </a:ext>
-            </a:extLst>
-          </p:cNvPr>
-          <p:cNvSpPr/>
-          <p:nvPr/>
-        </p:nvSpPr>
-        <p:spPr>
-          <a:xfrm>
-            <a:off x="8438099" y="5213990"/>
-            <a:ext cx="978408" cy="484632"/>
-          </a:xfrm>
-          <a:prstGeom prst="rightArrow">
-            <a:avLst/>
-          </a:prstGeom>
-          <a:solidFill>
-            <a:srgbClr val="FF0000"/>
-          </a:solidFill>
-        </p:spPr>
-        <p:style>
-          <a:lnRef idx="2">
-            <a:schemeClr val="dk1">
-              <a:shade val="50000"/>
-            </a:schemeClr>
-          </a:lnRef>
-          <a:fillRef idx="1">
-            <a:schemeClr val="dk1"/>
           </a:fillRef>
           <a:effectRef idx="0">
             <a:schemeClr val="dk1"/>
           </a:effectRef>
           <a:fontRef idx="minor">
-            <a:schemeClr val="lt1"/>
-          </a:fontRef>
-        </p:style>
-        <p:txBody>
-          <a:bodyPr rtlCol="0" anchor="ctr"/>
-          <a:lstStyle/>
-          <a:p>
-            <a:pPr algn="ctr"/>
-            <a:endParaRPr kumimoji="1" lang="ja-JP" altLang="en-US" dirty="0"/>
-          </a:p>
-        </p:txBody>
-      </p:sp>
-      <p:sp>
-        <p:nvSpPr>
-          <p:cNvPr id="14" name="正方形/長方形 13">
-            <a:extLst>
-              <a:ext uri="{FF2B5EF4-FFF2-40B4-BE49-F238E27FC236}">
-                <a16:creationId xmlns:a16="http://schemas.microsoft.com/office/drawing/2014/main" id="{BA078506-7E4C-4F5D-B9A4-35A7E62517A2}"/>
-              </a:ext>
-            </a:extLst>
-          </p:cNvPr>
-          <p:cNvSpPr/>
-          <p:nvPr/>
-        </p:nvSpPr>
-        <p:spPr>
-          <a:xfrm>
-            <a:off x="9655247" y="4672685"/>
-            <a:ext cx="2173513" cy="1567241"/>
-          </a:xfrm>
-          <a:prstGeom prst="rect">
-            <a:avLst/>
-          </a:prstGeom>
-          <a:ln>
-            <a:solidFill>
-              <a:schemeClr val="tx1"/>
-            </a:solidFill>
-          </a:ln>
-        </p:spPr>
-        <p:style>
-          <a:lnRef idx="2">
-            <a:schemeClr val="accent6"/>
-          </a:lnRef>
-          <a:fillRef idx="1">
-            <a:schemeClr val="lt1"/>
-          </a:fillRef>
-          <a:effectRef idx="0">
-            <a:schemeClr val="accent6"/>
-          </a:effectRef>
-          <a:fontRef idx="minor">
             <a:schemeClr val="dk1"/>
           </a:fontRef>
         </p:style>
@@ -7308,199 +7192,14 @@
           <a:bodyPr rtlCol="0" anchor="ctr"/>
           <a:lstStyle/>
           <a:p>
-            <a:pPr algn="ctr"/>
-            <a:r>
-              <a:rPr kumimoji="1" lang="ja-JP" altLang="en-US" sz="2400" dirty="0">
+            <a:r>
+              <a:rPr lang="ja-JP" altLang="en-US" dirty="0">
                 <a:latin typeface="メイリオ" panose="020B0604030504040204" pitchFamily="50" charset="-128"/>
                 <a:ea typeface="メイリオ" panose="020B0604030504040204" pitchFamily="50" charset="-128"/>
               </a:rPr>
-              <a:t>採点の点数が低いとゲーム</a:t>
-            </a:r>
-            <a:endParaRPr kumimoji="1" lang="en-US" altLang="ja-JP" sz="2400" dirty="0">
-              <a:latin typeface="メイリオ" panose="020B0604030504040204" pitchFamily="50" charset="-128"/>
-              <a:ea typeface="メイリオ" panose="020B0604030504040204" pitchFamily="50" charset="-128"/>
-            </a:endParaRPr>
-          </a:p>
-          <a:p>
-            <a:pPr algn="ctr"/>
-            <a:r>
-              <a:rPr kumimoji="1" lang="ja-JP" altLang="en-US" sz="2400" dirty="0">
-                <a:latin typeface="メイリオ" panose="020B0604030504040204" pitchFamily="50" charset="-128"/>
-                <a:ea typeface="メイリオ" panose="020B0604030504040204" pitchFamily="50" charset="-128"/>
-              </a:rPr>
-              <a:t>オーバー</a:t>
-            </a:r>
-          </a:p>
-        </p:txBody>
-      </p:sp>
-      <p:sp>
-        <p:nvSpPr>
-          <p:cNvPr id="16" name="正方形/長方形 15">
-            <a:extLst>
-              <a:ext uri="{FF2B5EF4-FFF2-40B4-BE49-F238E27FC236}">
-                <a16:creationId xmlns:a16="http://schemas.microsoft.com/office/drawing/2014/main" id="{CFB47AD2-AE9E-45A7-968A-6F4AF3BE494A}"/>
-              </a:ext>
-            </a:extLst>
-          </p:cNvPr>
-          <p:cNvSpPr/>
-          <p:nvPr/>
-        </p:nvSpPr>
-        <p:spPr>
-          <a:xfrm>
-            <a:off x="9655246" y="1994245"/>
-            <a:ext cx="2173513" cy="1567241"/>
-          </a:xfrm>
-          <a:prstGeom prst="rect">
-            <a:avLst/>
-          </a:prstGeom>
-          <a:ln>
-            <a:solidFill>
-              <a:schemeClr val="tx1"/>
-            </a:solidFill>
-          </a:ln>
-        </p:spPr>
-        <p:style>
-          <a:lnRef idx="2">
-            <a:schemeClr val="accent6"/>
-          </a:lnRef>
-          <a:fillRef idx="1">
-            <a:schemeClr val="lt1"/>
-          </a:fillRef>
-          <a:effectRef idx="0">
-            <a:schemeClr val="accent6"/>
-          </a:effectRef>
-          <a:fontRef idx="minor">
-            <a:schemeClr val="dk1"/>
-          </a:fontRef>
-        </p:style>
-        <p:txBody>
-          <a:bodyPr rtlCol="0" anchor="ctr"/>
-          <a:lstStyle/>
-          <a:p>
-            <a:pPr algn="ctr"/>
-            <a:r>
-              <a:rPr kumimoji="1" lang="ja-JP" altLang="en-US" sz="2400" dirty="0">
-                <a:latin typeface="メイリオ" panose="020B0604030504040204" pitchFamily="50" charset="-128"/>
-                <a:ea typeface="メイリオ" panose="020B0604030504040204" pitchFamily="50" charset="-128"/>
-              </a:rPr>
-              <a:t>合格点の場合</a:t>
-            </a:r>
-            <a:endParaRPr kumimoji="1" lang="en-US" altLang="ja-JP" sz="2400" dirty="0">
-              <a:latin typeface="メイリオ" panose="020B0604030504040204" pitchFamily="50" charset="-128"/>
-              <a:ea typeface="メイリオ" panose="020B0604030504040204" pitchFamily="50" charset="-128"/>
-            </a:endParaRPr>
-          </a:p>
-          <a:p>
-            <a:pPr algn="ctr"/>
-            <a:r>
-              <a:rPr lang="ja-JP" altLang="en-US" sz="2400" dirty="0">
-                <a:latin typeface="メイリオ" panose="020B0604030504040204" pitchFamily="50" charset="-128"/>
-                <a:ea typeface="メイリオ" panose="020B0604030504040204" pitchFamily="50" charset="-128"/>
-              </a:rPr>
-              <a:t>次のステージ</a:t>
-            </a:r>
-            <a:endParaRPr kumimoji="1" lang="ja-JP" altLang="en-US" sz="2400" dirty="0">
-              <a:latin typeface="メイリオ" panose="020B0604030504040204" pitchFamily="50" charset="-128"/>
-              <a:ea typeface="メイリオ" panose="020B0604030504040204" pitchFamily="50" charset="-128"/>
-            </a:endParaRPr>
-          </a:p>
-        </p:txBody>
-      </p:sp>
-      <p:sp>
-        <p:nvSpPr>
-          <p:cNvPr id="17" name="正方形/長方形 16">
-            <a:extLst>
-              <a:ext uri="{FF2B5EF4-FFF2-40B4-BE49-F238E27FC236}">
-                <a16:creationId xmlns:a16="http://schemas.microsoft.com/office/drawing/2014/main" id="{CD671C6A-53B5-4013-AC06-4471C2E108FA}"/>
-              </a:ext>
-            </a:extLst>
-          </p:cNvPr>
-          <p:cNvSpPr/>
-          <p:nvPr/>
-        </p:nvSpPr>
-        <p:spPr>
-          <a:xfrm>
-            <a:off x="7702943" y="4021367"/>
-            <a:ext cx="914400" cy="244016"/>
-          </a:xfrm>
-          <a:prstGeom prst="rect">
-            <a:avLst/>
-          </a:prstGeom>
-          <a:solidFill>
-            <a:srgbClr val="FF0000"/>
-          </a:solidFill>
-        </p:spPr>
-        <p:style>
-          <a:lnRef idx="2">
-            <a:schemeClr val="accent1">
-              <a:shade val="50000"/>
-            </a:schemeClr>
-          </a:lnRef>
-          <a:fillRef idx="1">
-            <a:schemeClr val="accent1"/>
-          </a:fillRef>
-          <a:effectRef idx="0">
-            <a:schemeClr val="accent1"/>
-          </a:effectRef>
-          <a:fontRef idx="minor">
-            <a:schemeClr val="lt1"/>
-          </a:fontRef>
-        </p:style>
-        <p:txBody>
-          <a:bodyPr rtlCol="0" anchor="ctr"/>
-          <a:lstStyle/>
-          <a:p>
-            <a:pPr algn="ctr"/>
-            <a:endParaRPr kumimoji="1" lang="ja-JP" altLang="en-US"/>
-          </a:p>
-        </p:txBody>
-      </p:sp>
-      <p:sp>
-        <p:nvSpPr>
-          <p:cNvPr id="18" name="正方形/長方形 17">
-            <a:extLst>
-              <a:ext uri="{FF2B5EF4-FFF2-40B4-BE49-F238E27FC236}">
-                <a16:creationId xmlns:a16="http://schemas.microsoft.com/office/drawing/2014/main" id="{2D640506-9CA0-4F68-91D2-B99950B4F70C}"/>
-              </a:ext>
-            </a:extLst>
-          </p:cNvPr>
-          <p:cNvSpPr/>
-          <p:nvPr/>
-        </p:nvSpPr>
-        <p:spPr>
-          <a:xfrm rot="5400000">
-            <a:off x="7331375" y="4010024"/>
-            <a:ext cx="2427572" cy="214124"/>
-          </a:xfrm>
-          <a:prstGeom prst="rect">
-            <a:avLst/>
-          </a:prstGeom>
-          <a:solidFill>
-            <a:srgbClr val="FF0000"/>
-          </a:solidFill>
-        </p:spPr>
-        <p:style>
-          <a:lnRef idx="2">
-            <a:schemeClr val="accent1">
-              <a:shade val="50000"/>
-            </a:schemeClr>
-          </a:lnRef>
-          <a:fillRef idx="1">
-            <a:schemeClr val="accent1"/>
-          </a:fillRef>
-          <a:effectRef idx="0">
-            <a:schemeClr val="accent1"/>
-          </a:effectRef>
-          <a:fontRef idx="minor">
-            <a:schemeClr val="lt1"/>
-          </a:fontRef>
-        </p:style>
-        <p:txBody>
-          <a:bodyPr rtlCol="0" anchor="ctr"/>
-          <a:lstStyle/>
-          <a:p>
-            <a:pPr algn="ctr"/>
-            <a:endParaRPr kumimoji="1" lang="ja-JP" altLang="en-US"/>
+              <a:t>１　筆を操作し、自由に書く</a:t>
+            </a:r>
+            <a:endParaRPr kumimoji="1" lang="ja-JP" altLang="en-US" dirty="0"/>
           </a:p>
         </p:txBody>
       </p:sp>
@@ -7531,10 +7230,10 @@
       </p:grpSpPr>
       <p:sp>
         <p:nvSpPr>
-          <p:cNvPr id="2" name="正方形/長方形 1">
-            <a:extLst>
-              <a:ext uri="{FF2B5EF4-FFF2-40B4-BE49-F238E27FC236}">
-                <a16:creationId xmlns:a16="http://schemas.microsoft.com/office/drawing/2014/main" id="{616D3496-DFED-417A-A61E-05C4AC640FD4}"/>
+          <p:cNvPr id="3" name="正方形/長方形 2">
+            <a:extLst>
+              <a:ext uri="{FF2B5EF4-FFF2-40B4-BE49-F238E27FC236}">
+                <a16:creationId xmlns:a16="http://schemas.microsoft.com/office/drawing/2014/main" id="{70EAE7B8-2E7A-4AF5-9F80-324BE3D322C8}"/>
               </a:ext>
             </a:extLst>
           </p:cNvPr>
@@ -7543,22 +7242,25 @@
         </p:nvSpPr>
         <p:spPr>
           <a:xfrm>
-            <a:off x="2209800" y="1447800"/>
-            <a:ext cx="914400" cy="914400"/>
+            <a:off x="184014" y="453350"/>
+            <a:ext cx="9060570" cy="914400"/>
           </a:xfrm>
           <a:prstGeom prst="rect">
             <a:avLst/>
           </a:prstGeom>
+          <a:ln>
+            <a:noFill/>
+          </a:ln>
         </p:spPr>
         <p:style>
           <a:lnRef idx="2">
-            <a:schemeClr val="dk1"/>
+            <a:schemeClr val="accent6"/>
           </a:lnRef>
           <a:fillRef idx="1">
             <a:schemeClr val="lt1"/>
           </a:fillRef>
           <a:effectRef idx="0">
-            <a:schemeClr val="dk1"/>
+            <a:schemeClr val="accent6"/>
           </a:effectRef>
           <a:fontRef idx="minor">
             <a:schemeClr val="dk1"/>
@@ -7570,51 +7272,190 @@
           <a:p>
             <a:pPr algn="ctr"/>
             <a:r>
-              <a:rPr kumimoji="1" lang="ja-JP" altLang="en-US" dirty="0">
+              <a:rPr kumimoji="1" lang="ja-JP" altLang="en-US" sz="4800" dirty="0">
+                <a:latin typeface="メイリオ" panose="020B0604030504040204" pitchFamily="50" charset="-128"/>
+                <a:ea typeface="メイリオ" panose="020B0604030504040204" pitchFamily="50" charset="-128"/>
+              </a:rPr>
+              <a:t>ゲームの流れ（お手本モード）</a:t>
+            </a:r>
+          </a:p>
+        </p:txBody>
+      </p:sp>
+      <p:sp>
+        <p:nvSpPr>
+          <p:cNvPr id="4" name="正方形/長方形 3">
+            <a:extLst>
+              <a:ext uri="{FF2B5EF4-FFF2-40B4-BE49-F238E27FC236}">
+                <a16:creationId xmlns:a16="http://schemas.microsoft.com/office/drawing/2014/main" id="{2A6CE379-9DB5-4E43-AE4A-565D343B3DEF}"/>
+              </a:ext>
+            </a:extLst>
+          </p:cNvPr>
+          <p:cNvSpPr/>
+          <p:nvPr/>
+        </p:nvSpPr>
+        <p:spPr>
+          <a:xfrm>
+            <a:off x="363240" y="3429000"/>
+            <a:ext cx="1461985" cy="1428750"/>
+          </a:xfrm>
+          <a:prstGeom prst="rect">
+            <a:avLst/>
+          </a:prstGeom>
+          <a:ln>
+            <a:solidFill>
+              <a:schemeClr val="tx1"/>
+            </a:solidFill>
+          </a:ln>
+        </p:spPr>
+        <p:style>
+          <a:lnRef idx="2">
+            <a:schemeClr val="accent6"/>
+          </a:lnRef>
+          <a:fillRef idx="1">
+            <a:schemeClr val="lt1"/>
+          </a:fillRef>
+          <a:effectRef idx="0">
+            <a:schemeClr val="accent6"/>
+          </a:effectRef>
+          <a:fontRef idx="minor">
+            <a:schemeClr val="dk1"/>
+          </a:fontRef>
+        </p:style>
+        <p:txBody>
+          <a:bodyPr rtlCol="0" anchor="ctr"/>
+          <a:lstStyle/>
+          <a:p>
+            <a:pPr algn="ctr"/>
+            <a:r>
+              <a:rPr kumimoji="1" lang="ja-JP" altLang="en-US" sz="2400" dirty="0">
+                <a:latin typeface="メイリオ" panose="020B0604030504040204" pitchFamily="50" charset="-128"/>
+                <a:ea typeface="メイリオ" panose="020B0604030504040204" pitchFamily="50" charset="-128"/>
+              </a:rPr>
+              <a:t>お手本を確認</a:t>
+            </a:r>
+          </a:p>
+        </p:txBody>
+      </p:sp>
+      <p:sp>
+        <p:nvSpPr>
+          <p:cNvPr id="5" name="正方形/長方形 4">
+            <a:extLst>
+              <a:ext uri="{FF2B5EF4-FFF2-40B4-BE49-F238E27FC236}">
+                <a16:creationId xmlns:a16="http://schemas.microsoft.com/office/drawing/2014/main" id="{91870252-9069-4CF2-BDB1-5539DA6535CC}"/>
+              </a:ext>
+            </a:extLst>
+          </p:cNvPr>
+          <p:cNvSpPr/>
+          <p:nvPr/>
+        </p:nvSpPr>
+        <p:spPr>
+          <a:xfrm>
+            <a:off x="3239547" y="3429000"/>
+            <a:ext cx="1461985" cy="1428750"/>
+          </a:xfrm>
+          <a:prstGeom prst="rect">
+            <a:avLst/>
+          </a:prstGeom>
+          <a:ln>
+            <a:solidFill>
+              <a:schemeClr val="tx1"/>
+            </a:solidFill>
+          </a:ln>
+        </p:spPr>
+        <p:style>
+          <a:lnRef idx="2">
+            <a:schemeClr val="accent6"/>
+          </a:lnRef>
+          <a:fillRef idx="1">
+            <a:schemeClr val="lt1"/>
+          </a:fillRef>
+          <a:effectRef idx="0">
+            <a:schemeClr val="accent6"/>
+          </a:effectRef>
+          <a:fontRef idx="minor">
+            <a:schemeClr val="dk1"/>
+          </a:fontRef>
+        </p:style>
+        <p:txBody>
+          <a:bodyPr rtlCol="0" anchor="ctr"/>
+          <a:lstStyle/>
+          <a:p>
+            <a:pPr algn="ctr"/>
+            <a:r>
+              <a:rPr kumimoji="1" lang="ja-JP" altLang="en-US" sz="2400" dirty="0">
+                <a:latin typeface="メイリオ" panose="020B0604030504040204" pitchFamily="50" charset="-128"/>
+                <a:ea typeface="メイリオ" panose="020B0604030504040204" pitchFamily="50" charset="-128"/>
+              </a:rPr>
+              <a:t>描く</a:t>
+            </a:r>
+          </a:p>
+        </p:txBody>
+      </p:sp>
+      <p:sp>
+        <p:nvSpPr>
+          <p:cNvPr id="6" name="正方形/長方形 5">
+            <a:extLst>
+              <a:ext uri="{FF2B5EF4-FFF2-40B4-BE49-F238E27FC236}">
+                <a16:creationId xmlns:a16="http://schemas.microsoft.com/office/drawing/2014/main" id="{595A4AA4-1310-49B0-B0FA-38D93BAA4E46}"/>
+              </a:ext>
+            </a:extLst>
+          </p:cNvPr>
+          <p:cNvSpPr/>
+          <p:nvPr/>
+        </p:nvSpPr>
+        <p:spPr>
+          <a:xfrm>
+            <a:off x="6083425" y="3429000"/>
+            <a:ext cx="1461985" cy="1428750"/>
+          </a:xfrm>
+          <a:prstGeom prst="rect">
+            <a:avLst/>
+          </a:prstGeom>
+          <a:ln>
+            <a:solidFill>
+              <a:schemeClr val="tx1"/>
+            </a:solidFill>
+          </a:ln>
+        </p:spPr>
+        <p:style>
+          <a:lnRef idx="2">
+            <a:schemeClr val="accent6"/>
+          </a:lnRef>
+          <a:fillRef idx="1">
+            <a:schemeClr val="lt1"/>
+          </a:fillRef>
+          <a:effectRef idx="0">
+            <a:schemeClr val="accent6"/>
+          </a:effectRef>
+          <a:fontRef idx="minor">
+            <a:schemeClr val="dk1"/>
+          </a:fontRef>
+        </p:style>
+        <p:txBody>
+          <a:bodyPr rtlCol="0" anchor="ctr"/>
+          <a:lstStyle/>
+          <a:p>
+            <a:pPr algn="ctr"/>
+            <a:r>
+              <a:rPr lang="ja-JP" altLang="en-US" sz="2400" dirty="0">
                 <a:latin typeface="メイリオ" panose="020B0604030504040204" pitchFamily="50" charset="-128"/>
                 <a:ea typeface="メイリオ" panose="020B0604030504040204" pitchFamily="50" charset="-128"/>
               </a:rPr>
               <a:t>採点</a:t>
             </a:r>
-          </a:p>
-        </p:txBody>
-      </p:sp>
-      <p:pic>
-        <p:nvPicPr>
-          <p:cNvPr id="4" name="図 3">
-            <a:extLst>
-              <a:ext uri="{FF2B5EF4-FFF2-40B4-BE49-F238E27FC236}">
-                <a16:creationId xmlns:a16="http://schemas.microsoft.com/office/drawing/2014/main" id="{E6EB119F-5233-49A7-BE53-E5BCBEC01CC9}"/>
-              </a:ext>
-            </a:extLst>
-          </p:cNvPr>
-          <p:cNvPicPr>
-            <a:picLocks noChangeAspect="1"/>
-          </p:cNvPicPr>
-          <p:nvPr/>
-        </p:nvPicPr>
-        <p:blipFill>
-          <a:blip r:embed="rId2"/>
-          <a:stretch>
-            <a:fillRect/>
-          </a:stretch>
-        </p:blipFill>
-        <p:spPr>
-          <a:xfrm>
-            <a:off x="0" y="0"/>
-            <a:ext cx="12185522" cy="7854696"/>
-          </a:xfrm>
-          <a:prstGeom prst="rect">
-            <a:avLst/>
-          </a:prstGeom>
-        </p:spPr>
-      </p:pic>
-      <p:sp>
-        <p:nvSpPr>
-          <p:cNvPr id="3" name="正方形/長方形 2">
-            <a:extLst>
-              <a:ext uri="{FF2B5EF4-FFF2-40B4-BE49-F238E27FC236}">
-                <a16:creationId xmlns:a16="http://schemas.microsoft.com/office/drawing/2014/main" id="{074DD7AB-D82C-4178-9B63-891A210F7A88}"/>
+            <a:endParaRPr kumimoji="1" lang="ja-JP" altLang="en-US" sz="2400" dirty="0">
+              <a:latin typeface="メイリオ" panose="020B0604030504040204" pitchFamily="50" charset="-128"/>
+              <a:ea typeface="メイリオ" panose="020B0604030504040204" pitchFamily="50" charset="-128"/>
+            </a:endParaRPr>
+          </a:p>
+        </p:txBody>
+      </p:sp>
+      <p:sp>
+        <p:nvSpPr>
+          <p:cNvPr id="8" name="矢印: 右 7">
+            <a:extLst>
+              <a:ext uri="{FF2B5EF4-FFF2-40B4-BE49-F238E27FC236}">
+                <a16:creationId xmlns:a16="http://schemas.microsoft.com/office/drawing/2014/main" id="{B583C0F8-8C54-4417-9EE0-84A0AF84E0DF}"/>
               </a:ext>
             </a:extLst>
           </p:cNvPr>
@@ -7623,14 +7464,63 @@
         </p:nvSpPr>
         <p:spPr>
           <a:xfrm>
-            <a:off x="3988308" y="283464"/>
-            <a:ext cx="4215384" cy="914400"/>
-          </a:xfrm>
-          <a:prstGeom prst="rect">
+            <a:off x="2071585" y="3906774"/>
+            <a:ext cx="978408" cy="484632"/>
+          </a:xfrm>
+          <a:prstGeom prst="rightArrow">
             <a:avLst/>
           </a:prstGeom>
           <a:solidFill>
-            <a:schemeClr val="accent5"/>
+            <a:srgbClr val="FF0000"/>
+          </a:solidFill>
+        </p:spPr>
+        <p:style>
+          <a:lnRef idx="2">
+            <a:schemeClr val="dk1">
+              <a:shade val="50000"/>
+            </a:schemeClr>
+          </a:lnRef>
+          <a:fillRef idx="1">
+            <a:schemeClr val="dk1"/>
+          </a:fillRef>
+          <a:effectRef idx="0">
+            <a:schemeClr val="dk1"/>
+          </a:effectRef>
+          <a:fontRef idx="minor">
+            <a:schemeClr val="lt1"/>
+          </a:fontRef>
+        </p:style>
+        <p:txBody>
+          <a:bodyPr rtlCol="0" anchor="ctr"/>
+          <a:lstStyle/>
+          <a:p>
+            <a:pPr algn="ctr"/>
+            <a:endParaRPr kumimoji="1" lang="ja-JP" altLang="en-US" dirty="0"/>
+          </a:p>
+        </p:txBody>
+      </p:sp>
+      <p:sp>
+        <p:nvSpPr>
+          <p:cNvPr id="9" name="矢印: 右 8">
+            <a:extLst>
+              <a:ext uri="{FF2B5EF4-FFF2-40B4-BE49-F238E27FC236}">
+                <a16:creationId xmlns:a16="http://schemas.microsoft.com/office/drawing/2014/main" id="{0D6B0945-959E-46D4-9780-A6377E1640D8}"/>
+              </a:ext>
+            </a:extLst>
+          </p:cNvPr>
+          <p:cNvSpPr/>
+          <p:nvPr/>
+        </p:nvSpPr>
+        <p:spPr>
+          <a:xfrm>
+            <a:off x="4947484" y="3874770"/>
+            <a:ext cx="978408" cy="484632"/>
+          </a:xfrm>
+          <a:prstGeom prst="rightArrow">
+            <a:avLst/>
+          </a:prstGeom>
+          <a:solidFill>
+            <a:srgbClr val="FF0000"/>
           </a:solidFill>
         </p:spPr>
         <p:style>
@@ -7654,6 +7544,498 @@
           <a:lstStyle/>
           <a:p>
             <a:pPr algn="ctr"/>
+            <a:endParaRPr kumimoji="1" lang="ja-JP" altLang="en-US"/>
+          </a:p>
+        </p:txBody>
+      </p:sp>
+      <p:sp>
+        <p:nvSpPr>
+          <p:cNvPr id="11" name="矢印: 右 10">
+            <a:extLst>
+              <a:ext uri="{FF2B5EF4-FFF2-40B4-BE49-F238E27FC236}">
+                <a16:creationId xmlns:a16="http://schemas.microsoft.com/office/drawing/2014/main" id="{0E396D52-BBC9-4447-B99D-71B7CC888F33}"/>
+              </a:ext>
+            </a:extLst>
+          </p:cNvPr>
+          <p:cNvSpPr/>
+          <p:nvPr/>
+        </p:nvSpPr>
+        <p:spPr>
+          <a:xfrm>
+            <a:off x="8438099" y="2535549"/>
+            <a:ext cx="978408" cy="484632"/>
+          </a:xfrm>
+          <a:prstGeom prst="rightArrow">
+            <a:avLst/>
+          </a:prstGeom>
+          <a:solidFill>
+            <a:srgbClr val="FF0000"/>
+          </a:solidFill>
+        </p:spPr>
+        <p:style>
+          <a:lnRef idx="2">
+            <a:schemeClr val="accent1">
+              <a:shade val="50000"/>
+            </a:schemeClr>
+          </a:lnRef>
+          <a:fillRef idx="1">
+            <a:schemeClr val="accent1"/>
+          </a:fillRef>
+          <a:effectRef idx="0">
+            <a:schemeClr val="accent1"/>
+          </a:effectRef>
+          <a:fontRef idx="minor">
+            <a:schemeClr val="lt1"/>
+          </a:fontRef>
+        </p:style>
+        <p:txBody>
+          <a:bodyPr rtlCol="0" anchor="ctr"/>
+          <a:lstStyle/>
+          <a:p>
+            <a:pPr algn="ctr"/>
+            <a:endParaRPr kumimoji="1" lang="ja-JP" altLang="en-US" dirty="0"/>
+          </a:p>
+        </p:txBody>
+      </p:sp>
+      <p:sp>
+        <p:nvSpPr>
+          <p:cNvPr id="13" name="矢印: 右 12">
+            <a:extLst>
+              <a:ext uri="{FF2B5EF4-FFF2-40B4-BE49-F238E27FC236}">
+                <a16:creationId xmlns:a16="http://schemas.microsoft.com/office/drawing/2014/main" id="{E2305F4F-61DB-4FA5-990D-0B147BC64A1D}"/>
+              </a:ext>
+            </a:extLst>
+          </p:cNvPr>
+          <p:cNvSpPr/>
+          <p:nvPr/>
+        </p:nvSpPr>
+        <p:spPr>
+          <a:xfrm>
+            <a:off x="8438099" y="5213990"/>
+            <a:ext cx="978408" cy="484632"/>
+          </a:xfrm>
+          <a:prstGeom prst="rightArrow">
+            <a:avLst/>
+          </a:prstGeom>
+          <a:solidFill>
+            <a:srgbClr val="FF0000"/>
+          </a:solidFill>
+        </p:spPr>
+        <p:style>
+          <a:lnRef idx="2">
+            <a:schemeClr val="dk1">
+              <a:shade val="50000"/>
+            </a:schemeClr>
+          </a:lnRef>
+          <a:fillRef idx="1">
+            <a:schemeClr val="dk1"/>
+          </a:fillRef>
+          <a:effectRef idx="0">
+            <a:schemeClr val="dk1"/>
+          </a:effectRef>
+          <a:fontRef idx="minor">
+            <a:schemeClr val="lt1"/>
+          </a:fontRef>
+        </p:style>
+        <p:txBody>
+          <a:bodyPr rtlCol="0" anchor="ctr"/>
+          <a:lstStyle/>
+          <a:p>
+            <a:pPr algn="ctr"/>
+            <a:endParaRPr kumimoji="1" lang="ja-JP" altLang="en-US" dirty="0"/>
+          </a:p>
+        </p:txBody>
+      </p:sp>
+      <p:sp>
+        <p:nvSpPr>
+          <p:cNvPr id="14" name="正方形/長方形 13">
+            <a:extLst>
+              <a:ext uri="{FF2B5EF4-FFF2-40B4-BE49-F238E27FC236}">
+                <a16:creationId xmlns:a16="http://schemas.microsoft.com/office/drawing/2014/main" id="{BA078506-7E4C-4F5D-B9A4-35A7E62517A2}"/>
+              </a:ext>
+            </a:extLst>
+          </p:cNvPr>
+          <p:cNvSpPr/>
+          <p:nvPr/>
+        </p:nvSpPr>
+        <p:spPr>
+          <a:xfrm>
+            <a:off x="9655247" y="4672685"/>
+            <a:ext cx="2173513" cy="1567241"/>
+          </a:xfrm>
+          <a:prstGeom prst="rect">
+            <a:avLst/>
+          </a:prstGeom>
+          <a:ln>
+            <a:solidFill>
+              <a:schemeClr val="tx1"/>
+            </a:solidFill>
+          </a:ln>
+        </p:spPr>
+        <p:style>
+          <a:lnRef idx="2">
+            <a:schemeClr val="accent6"/>
+          </a:lnRef>
+          <a:fillRef idx="1">
+            <a:schemeClr val="lt1"/>
+          </a:fillRef>
+          <a:effectRef idx="0">
+            <a:schemeClr val="accent6"/>
+          </a:effectRef>
+          <a:fontRef idx="minor">
+            <a:schemeClr val="dk1"/>
+          </a:fontRef>
+        </p:style>
+        <p:txBody>
+          <a:bodyPr rtlCol="0" anchor="ctr"/>
+          <a:lstStyle/>
+          <a:p>
+            <a:pPr algn="ctr"/>
+            <a:r>
+              <a:rPr kumimoji="1" lang="ja-JP" altLang="en-US" sz="2400" dirty="0">
+                <a:latin typeface="メイリオ" panose="020B0604030504040204" pitchFamily="50" charset="-128"/>
+                <a:ea typeface="メイリオ" panose="020B0604030504040204" pitchFamily="50" charset="-128"/>
+              </a:rPr>
+              <a:t>採点の点数が低いとゲーム</a:t>
+            </a:r>
+            <a:endParaRPr kumimoji="1" lang="en-US" altLang="ja-JP" sz="2400" dirty="0">
+              <a:latin typeface="メイリオ" panose="020B0604030504040204" pitchFamily="50" charset="-128"/>
+              <a:ea typeface="メイリオ" panose="020B0604030504040204" pitchFamily="50" charset="-128"/>
+            </a:endParaRPr>
+          </a:p>
+          <a:p>
+            <a:pPr algn="ctr"/>
+            <a:r>
+              <a:rPr kumimoji="1" lang="ja-JP" altLang="en-US" sz="2400" dirty="0">
+                <a:latin typeface="メイリオ" panose="020B0604030504040204" pitchFamily="50" charset="-128"/>
+                <a:ea typeface="メイリオ" panose="020B0604030504040204" pitchFamily="50" charset="-128"/>
+              </a:rPr>
+              <a:t>オーバー</a:t>
+            </a:r>
+          </a:p>
+        </p:txBody>
+      </p:sp>
+      <p:sp>
+        <p:nvSpPr>
+          <p:cNvPr id="16" name="正方形/長方形 15">
+            <a:extLst>
+              <a:ext uri="{FF2B5EF4-FFF2-40B4-BE49-F238E27FC236}">
+                <a16:creationId xmlns:a16="http://schemas.microsoft.com/office/drawing/2014/main" id="{CFB47AD2-AE9E-45A7-968A-6F4AF3BE494A}"/>
+              </a:ext>
+            </a:extLst>
+          </p:cNvPr>
+          <p:cNvSpPr/>
+          <p:nvPr/>
+        </p:nvSpPr>
+        <p:spPr>
+          <a:xfrm>
+            <a:off x="9655246" y="1994245"/>
+            <a:ext cx="2173513" cy="1567241"/>
+          </a:xfrm>
+          <a:prstGeom prst="rect">
+            <a:avLst/>
+          </a:prstGeom>
+          <a:ln>
+            <a:solidFill>
+              <a:schemeClr val="tx1"/>
+            </a:solidFill>
+          </a:ln>
+        </p:spPr>
+        <p:style>
+          <a:lnRef idx="2">
+            <a:schemeClr val="accent6"/>
+          </a:lnRef>
+          <a:fillRef idx="1">
+            <a:schemeClr val="lt1"/>
+          </a:fillRef>
+          <a:effectRef idx="0">
+            <a:schemeClr val="accent6"/>
+          </a:effectRef>
+          <a:fontRef idx="minor">
+            <a:schemeClr val="dk1"/>
+          </a:fontRef>
+        </p:style>
+        <p:txBody>
+          <a:bodyPr rtlCol="0" anchor="ctr"/>
+          <a:lstStyle/>
+          <a:p>
+            <a:pPr algn="ctr"/>
+            <a:r>
+              <a:rPr kumimoji="1" lang="ja-JP" altLang="en-US" sz="2400" dirty="0">
+                <a:latin typeface="メイリオ" panose="020B0604030504040204" pitchFamily="50" charset="-128"/>
+                <a:ea typeface="メイリオ" panose="020B0604030504040204" pitchFamily="50" charset="-128"/>
+              </a:rPr>
+              <a:t>合格点の場合</a:t>
+            </a:r>
+            <a:endParaRPr kumimoji="1" lang="en-US" altLang="ja-JP" sz="2400" dirty="0">
+              <a:latin typeface="メイリオ" panose="020B0604030504040204" pitchFamily="50" charset="-128"/>
+              <a:ea typeface="メイリオ" panose="020B0604030504040204" pitchFamily="50" charset="-128"/>
+            </a:endParaRPr>
+          </a:p>
+          <a:p>
+            <a:pPr algn="ctr"/>
+            <a:r>
+              <a:rPr lang="ja-JP" altLang="en-US" sz="2400" dirty="0">
+                <a:latin typeface="メイリオ" panose="020B0604030504040204" pitchFamily="50" charset="-128"/>
+                <a:ea typeface="メイリオ" panose="020B0604030504040204" pitchFamily="50" charset="-128"/>
+              </a:rPr>
+              <a:t>次のステージ</a:t>
+            </a:r>
+            <a:endParaRPr kumimoji="1" lang="ja-JP" altLang="en-US" sz="2400" dirty="0">
+              <a:latin typeface="メイリオ" panose="020B0604030504040204" pitchFamily="50" charset="-128"/>
+              <a:ea typeface="メイリオ" panose="020B0604030504040204" pitchFamily="50" charset="-128"/>
+            </a:endParaRPr>
+          </a:p>
+        </p:txBody>
+      </p:sp>
+      <p:sp>
+        <p:nvSpPr>
+          <p:cNvPr id="17" name="正方形/長方形 16">
+            <a:extLst>
+              <a:ext uri="{FF2B5EF4-FFF2-40B4-BE49-F238E27FC236}">
+                <a16:creationId xmlns:a16="http://schemas.microsoft.com/office/drawing/2014/main" id="{CD671C6A-53B5-4013-AC06-4471C2E108FA}"/>
+              </a:ext>
+            </a:extLst>
+          </p:cNvPr>
+          <p:cNvSpPr/>
+          <p:nvPr/>
+        </p:nvSpPr>
+        <p:spPr>
+          <a:xfrm>
+            <a:off x="7702943" y="4021367"/>
+            <a:ext cx="914400" cy="244016"/>
+          </a:xfrm>
+          <a:prstGeom prst="rect">
+            <a:avLst/>
+          </a:prstGeom>
+          <a:solidFill>
+            <a:srgbClr val="FF0000"/>
+          </a:solidFill>
+        </p:spPr>
+        <p:style>
+          <a:lnRef idx="2">
+            <a:schemeClr val="accent1">
+              <a:shade val="50000"/>
+            </a:schemeClr>
+          </a:lnRef>
+          <a:fillRef idx="1">
+            <a:schemeClr val="accent1"/>
+          </a:fillRef>
+          <a:effectRef idx="0">
+            <a:schemeClr val="accent1"/>
+          </a:effectRef>
+          <a:fontRef idx="minor">
+            <a:schemeClr val="lt1"/>
+          </a:fontRef>
+        </p:style>
+        <p:txBody>
+          <a:bodyPr rtlCol="0" anchor="ctr"/>
+          <a:lstStyle/>
+          <a:p>
+            <a:pPr algn="ctr"/>
+            <a:endParaRPr kumimoji="1" lang="ja-JP" altLang="en-US"/>
+          </a:p>
+        </p:txBody>
+      </p:sp>
+      <p:sp>
+        <p:nvSpPr>
+          <p:cNvPr id="18" name="正方形/長方形 17">
+            <a:extLst>
+              <a:ext uri="{FF2B5EF4-FFF2-40B4-BE49-F238E27FC236}">
+                <a16:creationId xmlns:a16="http://schemas.microsoft.com/office/drawing/2014/main" id="{2D640506-9CA0-4F68-91D2-B99950B4F70C}"/>
+              </a:ext>
+            </a:extLst>
+          </p:cNvPr>
+          <p:cNvSpPr/>
+          <p:nvPr/>
+        </p:nvSpPr>
+        <p:spPr>
+          <a:xfrm rot="5400000">
+            <a:off x="7331375" y="4010024"/>
+            <a:ext cx="2427572" cy="214124"/>
+          </a:xfrm>
+          <a:prstGeom prst="rect">
+            <a:avLst/>
+          </a:prstGeom>
+          <a:solidFill>
+            <a:srgbClr val="FF0000"/>
+          </a:solidFill>
+        </p:spPr>
+        <p:style>
+          <a:lnRef idx="2">
+            <a:schemeClr val="accent1">
+              <a:shade val="50000"/>
+            </a:schemeClr>
+          </a:lnRef>
+          <a:fillRef idx="1">
+            <a:schemeClr val="accent1"/>
+          </a:fillRef>
+          <a:effectRef idx="0">
+            <a:schemeClr val="accent1"/>
+          </a:effectRef>
+          <a:fontRef idx="minor">
+            <a:schemeClr val="lt1"/>
+          </a:fontRef>
+        </p:style>
+        <p:txBody>
+          <a:bodyPr rtlCol="0" anchor="ctr"/>
+          <a:lstStyle/>
+          <a:p>
+            <a:pPr algn="ctr"/>
+            <a:endParaRPr kumimoji="1" lang="ja-JP" altLang="en-US"/>
+          </a:p>
+        </p:txBody>
+      </p:sp>
+    </p:spTree>
+  </p:cSld>
+  <p:clrMapOvr>
+    <a:masterClrMapping/>
+  </p:clrMapOvr>
+</p:sld>
+</file>
+
+<file path=ppt/slides/slide8.xml><?xml version="1.0" encoding="utf-8"?>
+<p:sld xmlns:a="http://schemas.openxmlformats.org/drawingml/2006/main" xmlns:r="http://schemas.openxmlformats.org/officeDocument/2006/relationships" xmlns:p="http://schemas.openxmlformats.org/presentationml/2006/main">
+  <p:cSld>
+    <p:spTree>
+      <p:nvGrpSpPr>
+        <p:cNvPr id="1" name=""/>
+        <p:cNvGrpSpPr/>
+        <p:nvPr/>
+      </p:nvGrpSpPr>
+      <p:grpSpPr>
+        <a:xfrm>
+          <a:off x="0" y="0"/>
+          <a:ext cx="0" cy="0"/>
+          <a:chOff x="0" y="0"/>
+          <a:chExt cx="0" cy="0"/>
+        </a:xfrm>
+      </p:grpSpPr>
+      <p:sp>
+        <p:nvSpPr>
+          <p:cNvPr id="2" name="正方形/長方形 1">
+            <a:extLst>
+              <a:ext uri="{FF2B5EF4-FFF2-40B4-BE49-F238E27FC236}">
+                <a16:creationId xmlns:a16="http://schemas.microsoft.com/office/drawing/2014/main" id="{616D3496-DFED-417A-A61E-05C4AC640FD4}"/>
+              </a:ext>
+            </a:extLst>
+          </p:cNvPr>
+          <p:cNvSpPr/>
+          <p:nvPr/>
+        </p:nvSpPr>
+        <p:spPr>
+          <a:xfrm>
+            <a:off x="2209800" y="1447800"/>
+            <a:ext cx="914400" cy="914400"/>
+          </a:xfrm>
+          <a:prstGeom prst="rect">
+            <a:avLst/>
+          </a:prstGeom>
+        </p:spPr>
+        <p:style>
+          <a:lnRef idx="2">
+            <a:schemeClr val="dk1"/>
+          </a:lnRef>
+          <a:fillRef idx="1">
+            <a:schemeClr val="lt1"/>
+          </a:fillRef>
+          <a:effectRef idx="0">
+            <a:schemeClr val="dk1"/>
+          </a:effectRef>
+          <a:fontRef idx="minor">
+            <a:schemeClr val="dk1"/>
+          </a:fontRef>
+        </p:style>
+        <p:txBody>
+          <a:bodyPr rtlCol="0" anchor="ctr"/>
+          <a:lstStyle/>
+          <a:p>
+            <a:pPr algn="ctr"/>
+            <a:r>
+              <a:rPr kumimoji="1" lang="ja-JP" altLang="en-US" dirty="0">
+                <a:latin typeface="メイリオ" panose="020B0604030504040204" pitchFamily="50" charset="-128"/>
+                <a:ea typeface="メイリオ" panose="020B0604030504040204" pitchFamily="50" charset="-128"/>
+              </a:rPr>
+              <a:t>採点</a:t>
+            </a:r>
+          </a:p>
+        </p:txBody>
+      </p:sp>
+      <p:pic>
+        <p:nvPicPr>
+          <p:cNvPr id="4" name="図 3">
+            <a:extLst>
+              <a:ext uri="{FF2B5EF4-FFF2-40B4-BE49-F238E27FC236}">
+                <a16:creationId xmlns:a16="http://schemas.microsoft.com/office/drawing/2014/main" id="{E6EB119F-5233-49A7-BE53-E5BCBEC01CC9}"/>
+              </a:ext>
+            </a:extLst>
+          </p:cNvPr>
+          <p:cNvPicPr>
+            <a:picLocks noChangeAspect="1"/>
+          </p:cNvPicPr>
+          <p:nvPr/>
+        </p:nvPicPr>
+        <p:blipFill>
+          <a:blip r:embed="rId2"/>
+          <a:stretch>
+            <a:fillRect/>
+          </a:stretch>
+        </p:blipFill>
+        <p:spPr>
+          <a:xfrm>
+            <a:off x="0" y="0"/>
+            <a:ext cx="12185522" cy="7854696"/>
+          </a:xfrm>
+          <a:prstGeom prst="rect">
+            <a:avLst/>
+          </a:prstGeom>
+        </p:spPr>
+      </p:pic>
+      <p:sp>
+        <p:nvSpPr>
+          <p:cNvPr id="3" name="正方形/長方形 2">
+            <a:extLst>
+              <a:ext uri="{FF2B5EF4-FFF2-40B4-BE49-F238E27FC236}">
+                <a16:creationId xmlns:a16="http://schemas.microsoft.com/office/drawing/2014/main" id="{074DD7AB-D82C-4178-9B63-891A210F7A88}"/>
+              </a:ext>
+            </a:extLst>
+          </p:cNvPr>
+          <p:cNvSpPr/>
+          <p:nvPr/>
+        </p:nvSpPr>
+        <p:spPr>
+          <a:xfrm>
+            <a:off x="3988308" y="283464"/>
+            <a:ext cx="4215384" cy="914400"/>
+          </a:xfrm>
+          <a:prstGeom prst="rect">
+            <a:avLst/>
+          </a:prstGeom>
+          <a:solidFill>
+            <a:schemeClr val="accent5"/>
+          </a:solidFill>
+        </p:spPr>
+        <p:style>
+          <a:lnRef idx="2">
+            <a:schemeClr val="accent1">
+              <a:shade val="50000"/>
+            </a:schemeClr>
+          </a:lnRef>
+          <a:fillRef idx="1">
+            <a:schemeClr val="accent1"/>
+          </a:fillRef>
+          <a:effectRef idx="0">
+            <a:schemeClr val="accent1"/>
+          </a:effectRef>
+          <a:fontRef idx="minor">
+            <a:schemeClr val="lt1"/>
+          </a:fontRef>
+        </p:style>
+        <p:txBody>
+          <a:bodyPr rtlCol="0" anchor="ctr"/>
+          <a:lstStyle/>
+          <a:p>
+            <a:pPr algn="ctr"/>
             <a:r>
               <a:rPr kumimoji="1" lang="ja-JP" altLang="en-US" sz="6000" dirty="0">
                 <a:solidFill>
@@ -7680,7 +8062,7 @@
 </p:sld>
 </file>
 
-<file path=ppt/slides/slide8.xml><?xml version="1.0" encoding="utf-8"?>
+<file path=ppt/slides/slide9.xml><?xml version="1.0" encoding="utf-8"?>
 <p:sld xmlns:a="http://schemas.openxmlformats.org/drawingml/2006/main" xmlns:r="http://schemas.openxmlformats.org/officeDocument/2006/relationships" xmlns:p="http://schemas.openxmlformats.org/presentationml/2006/main">
   <p:cSld>
     <p:spTree>
@@ -7940,232 +8322,6 @@
       <p:bldP spid="3" grpId="0" animBg="1"/>
     </p:bldLst>
   </p:timing>
-</p:sld>
-</file>
-
-<file path=ppt/slides/slide9.xml><?xml version="1.0" encoding="utf-8"?>
-<p:sld xmlns:a="http://schemas.openxmlformats.org/drawingml/2006/main" xmlns:r="http://schemas.openxmlformats.org/officeDocument/2006/relationships" xmlns:p="http://schemas.openxmlformats.org/presentationml/2006/main">
-  <p:cSld>
-    <p:spTree>
-      <p:nvGrpSpPr>
-        <p:cNvPr id="1" name=""/>
-        <p:cNvGrpSpPr/>
-        <p:nvPr/>
-      </p:nvGrpSpPr>
-      <p:grpSpPr>
-        <a:xfrm>
-          <a:off x="0" y="0"/>
-          <a:ext cx="0" cy="0"/>
-          <a:chOff x="0" y="0"/>
-          <a:chExt cx="0" cy="0"/>
-        </a:xfrm>
-      </p:grpSpPr>
-      <p:sp>
-        <p:nvSpPr>
-          <p:cNvPr id="4" name="正方形/長方形 3">
-            <a:extLst>
-              <a:ext uri="{FF2B5EF4-FFF2-40B4-BE49-F238E27FC236}">
-                <a16:creationId xmlns:a16="http://schemas.microsoft.com/office/drawing/2014/main" id="{6840A768-F67B-4920-B60C-4E4E518CFD24}"/>
-              </a:ext>
-            </a:extLst>
-          </p:cNvPr>
-          <p:cNvSpPr/>
-          <p:nvPr/>
-        </p:nvSpPr>
-        <p:spPr>
-          <a:xfrm>
-            <a:off x="184014" y="453350"/>
-            <a:ext cx="5911986" cy="2854054"/>
-          </a:xfrm>
-          <a:prstGeom prst="rect">
-            <a:avLst/>
-          </a:prstGeom>
-          <a:ln>
-            <a:noFill/>
-          </a:ln>
-        </p:spPr>
-        <p:style>
-          <a:lnRef idx="2">
-            <a:schemeClr val="accent6"/>
-          </a:lnRef>
-          <a:fillRef idx="1">
-            <a:schemeClr val="lt1"/>
-          </a:fillRef>
-          <a:effectRef idx="0">
-            <a:schemeClr val="accent6"/>
-          </a:effectRef>
-          <a:fontRef idx="minor">
-            <a:schemeClr val="dk1"/>
-          </a:fontRef>
-        </p:style>
-        <p:txBody>
-          <a:bodyPr rtlCol="0" anchor="ctr"/>
-          <a:lstStyle/>
-          <a:p>
-            <a:pPr algn="ctr"/>
-            <a:r>
-              <a:rPr lang="ja-JP" altLang="en-US" sz="4800" dirty="0">
-                <a:latin typeface="メイリオ" panose="020B0604030504040204" pitchFamily="50" charset="-128"/>
-                <a:ea typeface="メイリオ" panose="020B0604030504040204" pitchFamily="50" charset="-128"/>
-              </a:rPr>
-              <a:t>既存のゲームとの</a:t>
-            </a:r>
-            <a:endParaRPr lang="en-US" altLang="ja-JP" sz="4800" dirty="0">
-              <a:latin typeface="メイリオ" panose="020B0604030504040204" pitchFamily="50" charset="-128"/>
-              <a:ea typeface="メイリオ" panose="020B0604030504040204" pitchFamily="50" charset="-128"/>
-            </a:endParaRPr>
-          </a:p>
-          <a:p>
-            <a:pPr algn="ctr"/>
-            <a:r>
-              <a:rPr lang="ja-JP" altLang="en-US" sz="4800" dirty="0">
-                <a:latin typeface="メイリオ" panose="020B0604030504040204" pitchFamily="50" charset="-128"/>
-                <a:ea typeface="メイリオ" panose="020B0604030504040204" pitchFamily="50" charset="-128"/>
-              </a:rPr>
-              <a:t>差別点</a:t>
-            </a:r>
-            <a:endParaRPr lang="en-US" altLang="ja-JP" sz="4800" dirty="0">
-              <a:latin typeface="メイリオ" panose="020B0604030504040204" pitchFamily="50" charset="-128"/>
-              <a:ea typeface="メイリオ" panose="020B0604030504040204" pitchFamily="50" charset="-128"/>
-            </a:endParaRPr>
-          </a:p>
-          <a:p>
-            <a:pPr algn="ctr"/>
-            <a:endParaRPr kumimoji="1" lang="ja-JP" altLang="en-US" sz="4800" dirty="0">
-              <a:latin typeface="メイリオ" panose="020B0604030504040204" pitchFamily="50" charset="-128"/>
-              <a:ea typeface="メイリオ" panose="020B0604030504040204" pitchFamily="50" charset="-128"/>
-            </a:endParaRPr>
-          </a:p>
-        </p:txBody>
-      </p:sp>
-      <p:pic>
-        <p:nvPicPr>
-          <p:cNvPr id="5" name="図 4">
-            <a:extLst>
-              <a:ext uri="{FF2B5EF4-FFF2-40B4-BE49-F238E27FC236}">
-                <a16:creationId xmlns:a16="http://schemas.microsoft.com/office/drawing/2014/main" id="{3258D720-4F32-47AB-A04F-C0226CFDB304}"/>
-              </a:ext>
-            </a:extLst>
-          </p:cNvPr>
-          <p:cNvPicPr>
-            <a:picLocks noChangeAspect="1"/>
-          </p:cNvPicPr>
-          <p:nvPr/>
-        </p:nvPicPr>
-        <p:blipFill>
-          <a:blip r:embed="rId2"/>
-          <a:stretch>
-            <a:fillRect/>
-          </a:stretch>
-        </p:blipFill>
-        <p:spPr>
-          <a:xfrm>
-            <a:off x="5911986" y="2348834"/>
-            <a:ext cx="6280014" cy="3981450"/>
-          </a:xfrm>
-          <a:prstGeom prst="rect">
-            <a:avLst/>
-          </a:prstGeom>
-        </p:spPr>
-      </p:pic>
-      <p:pic>
-        <p:nvPicPr>
-          <p:cNvPr id="8" name="図 7">
-            <a:extLst>
-              <a:ext uri="{FF2B5EF4-FFF2-40B4-BE49-F238E27FC236}">
-                <a16:creationId xmlns:a16="http://schemas.microsoft.com/office/drawing/2014/main" id="{E15A6B13-698C-466F-8857-1D17DD41414E}"/>
-              </a:ext>
-            </a:extLst>
-          </p:cNvPr>
-          <p:cNvPicPr>
-            <a:picLocks noChangeAspect="1"/>
-          </p:cNvPicPr>
-          <p:nvPr/>
-        </p:nvPicPr>
-        <p:blipFill>
-          <a:blip r:embed="rId3"/>
-          <a:stretch>
-            <a:fillRect/>
-          </a:stretch>
-        </p:blipFill>
-        <p:spPr>
-          <a:xfrm>
-            <a:off x="0" y="2244059"/>
-            <a:ext cx="5911986" cy="4086225"/>
-          </a:xfrm>
-          <a:prstGeom prst="rect">
-            <a:avLst/>
-          </a:prstGeom>
-        </p:spPr>
-      </p:pic>
-      <p:sp>
-        <p:nvSpPr>
-          <p:cNvPr id="9" name="正方形/長方形 8">
-            <a:extLst>
-              <a:ext uri="{FF2B5EF4-FFF2-40B4-BE49-F238E27FC236}">
-                <a16:creationId xmlns:a16="http://schemas.microsoft.com/office/drawing/2014/main" id="{AE2D33BF-6DBF-49C0-BADC-46794B569439}"/>
-              </a:ext>
-            </a:extLst>
-          </p:cNvPr>
-          <p:cNvSpPr/>
-          <p:nvPr/>
-        </p:nvSpPr>
-        <p:spPr>
-          <a:xfrm>
-            <a:off x="7143749" y="757083"/>
-            <a:ext cx="3571875" cy="928841"/>
-          </a:xfrm>
-          <a:prstGeom prst="rect">
-            <a:avLst/>
-          </a:prstGeom>
-          <a:ln>
-            <a:solidFill>
-              <a:schemeClr val="bg1"/>
-            </a:solidFill>
-          </a:ln>
-        </p:spPr>
-        <p:style>
-          <a:lnRef idx="2">
-            <a:schemeClr val="dk1"/>
-          </a:lnRef>
-          <a:fillRef idx="1">
-            <a:schemeClr val="lt1"/>
-          </a:fillRef>
-          <a:effectRef idx="0">
-            <a:schemeClr val="dk1"/>
-          </a:effectRef>
-          <a:fontRef idx="minor">
-            <a:schemeClr val="dk1"/>
-          </a:fontRef>
-        </p:style>
-        <p:txBody>
-          <a:bodyPr rtlCol="0" anchor="ctr"/>
-          <a:lstStyle/>
-          <a:p>
-            <a:pPr algn="ctr"/>
-            <a:r>
-              <a:rPr kumimoji="1" lang="ja-JP" altLang="en-US" sz="4400" dirty="0">
-                <a:solidFill>
-                  <a:srgbClr val="FF0000"/>
-                </a:solidFill>
-                <a:latin typeface="メイリオ" panose="020B0604030504040204" pitchFamily="50" charset="-128"/>
-                <a:ea typeface="メイリオ" panose="020B0604030504040204" pitchFamily="50" charset="-128"/>
-              </a:rPr>
-              <a:t>このゲームは筆目線</a:t>
-            </a:r>
-          </a:p>
-        </p:txBody>
-      </p:sp>
-    </p:spTree>
-    <p:extLst>
-      <p:ext uri="{BB962C8B-B14F-4D97-AF65-F5344CB8AC3E}">
-        <p14:creationId xmlns:p14="http://schemas.microsoft.com/office/powerpoint/2010/main" val="1417576500"/>
-      </p:ext>
-    </p:extLst>
-  </p:cSld>
-  <p:clrMapOvr>
-    <a:masterClrMapping/>
-  </p:clrMapOvr>
 </p:sld>
 </file>
 
